--- a/docs/测试执行方案.pptx
+++ b/docs/测试执行方案.pptx
@@ -7,6 +7,7 @@
   <p:sldIdLst>
     <p:sldId id="256" r:id="rId7"/>
     <p:sldId id="257" r:id="rId9"/>
+    <p:sldId id="258" r:id="rId10"/>
   </p:sldIdLst>
   <p:sldSz cx="12188952" cy="6858000" type="screen4x3"/>
   <p:notesSz cx="6858000" cy="9144000"/>
@@ -574,6 +575,76 @@
           <a:p>
             <a:r>
               <a:t>方案A 指整份或分段一次 pytest 执行；方案B 指完全绕开 pytest、由 Runner 顺序调用用例函数；方案C 为现状，即每条用例一个独立 pytest 进程。方案A 与方案C 均在连接复用与故障隔离之间取舍；在可接受单条用例占用测试台的前提下推荐方案A。</a:t>
+            </a:r>
+          </a:p>
+        </p:txBody>
+      </p:sp>
+      <p:sp>
+        <p:nvSpPr>
+          <p:cNvPr id="4" name="Slide Number Placeholder 3"/>
+          <p:cNvSpPr>
+            <a:spLocks noGrp="1"/>
+          </p:cNvSpPr>
+          <p:nvPr>
+            <p:ph type="sldNum" idx="5" sz="quarter"/>
+          </p:nvPr>
+        </p:nvSpPr>
+        <p:spPr/>
+      </p:sp>
+    </p:spTree>
+  </p:cSld>
+  <p:clrMapOvr>
+    <a:masterClrMapping/>
+  </p:clrMapOvr>
+</p:notes>
+</file>
+
+<file path=ppt/notesSlides/notesSlide3.xml><?xml version="1.0" encoding="utf-8"?>
+<p:notes xmlns:a="http://schemas.openxmlformats.org/drawingml/2006/main" xmlns:p="http://schemas.openxmlformats.org/presentationml/2006/main" xmlns:r="http://schemas.openxmlformats.org/officeDocument/2006/relationships">
+  <p:cSld>
+    <p:spTree>
+      <p:nvGrpSpPr>
+        <p:cNvPr id="1" name=""/>
+        <p:cNvGrpSpPr/>
+        <p:nvPr/>
+      </p:nvGrpSpPr>
+      <p:grpSpPr>
+        <a:xfrm>
+          <a:off x="0" y="0"/>
+          <a:ext cx="0" cy="0"/>
+          <a:chOff x="0" y="0"/>
+          <a:chExt cx="0" cy="0"/>
+        </a:xfrm>
+      </p:grpSpPr>
+      <p:sp>
+        <p:nvSpPr>
+          <p:cNvPr id="2" name="Slide Image Placeholder 1"/>
+          <p:cNvSpPr>
+            <a:spLocks noGrp="1"/>
+          </p:cNvSpPr>
+          <p:nvPr>
+            <p:ph type="sldImg" idx="2"/>
+          </p:nvPr>
+        </p:nvSpPr>
+        <p:spPr/>
+      </p:sp>
+      <p:sp>
+        <p:nvSpPr>
+          <p:cNvPr id="3" name="Notes Placeholder 2"/>
+          <p:cNvSpPr>
+            <a:spLocks noGrp="1"/>
+          </p:cNvSpPr>
+          <p:nvPr>
+            <p:ph type="body" idx="3" sz="quarter"/>
+          </p:nvPr>
+        </p:nvSpPr>
+        <p:spPr/>
+        <p:txBody>
+          <a:bodyPr/>
+          <a:lstStyle/>
+          <a:p>
+            <a:r>
+              <a:t>本页为《各方案潜在问题对照》信息图。方案C 标注「ATE 现状」，即当前 ATE 采用的逐用例多进程执行方式。三类方案的问题均围绕：故障隔离、硬超时能力、交互控制、数据传递、连接复用与口径变化展开。</a:t>
             </a:r>
           </a:p>
         </p:txBody>
@@ -4131,7 +4202,7 @@
                 <a:latin typeface="Segoe UI"/>
                 <a:ea typeface="微软雅黑"/>
               </a:rPr>
-              <a:t>评估对象：现有三条可选执行路线</a:t>
+              <a:t>评估对象：现有三条可选执行路线　·　当前 ATE 采用：方案C（逐用例多进程）</a:t>
             </a:r>
           </a:p>
         </p:txBody>
@@ -4161,7 +4232,7 @@
                 <a:gridCol w="2971800"/>
                 <a:gridCol w="2971800"/>
               </a:tblGrid>
-              <a:tr h="548640">
+              <a:tr h="621792">
                 <a:tc>
                   <a:txBody>
                     <a:bodyPr wrap="square"/>
@@ -4248,7 +4319,7 @@
                           <a:latin typeface="Segoe UI"/>
                           <a:ea typeface="微软雅黑"/>
                         </a:rPr>
-                        <a:t>方案C：多 pytest 进程（逐用例）</a:t>
+                        <a:t>方案C：多 pytest 进程（逐用例）· ATE 现状</a:t>
                       </a:r>
                     </a:p>
                   </a:txBody>
@@ -4259,7 +4330,7 @@
                   </a:tcPr>
                 </a:tc>
               </a:tr>
-              <a:tr h="457200">
+              <a:tr h="448056">
                 <a:tc>
                   <a:txBody>
                     <a:bodyPr wrap="square"/>
@@ -4357,7 +4428,7 @@
                   </a:tcPr>
                 </a:tc>
               </a:tr>
-              <a:tr h="457200">
+              <a:tr h="448056">
                 <a:tc>
                   <a:txBody>
                     <a:bodyPr wrap="square"/>
@@ -4455,7 +4526,7 @@
                   </a:tcPr>
                 </a:tc>
               </a:tr>
-              <a:tr h="457200">
+              <a:tr h="448056">
                 <a:tc>
                   <a:txBody>
                     <a:bodyPr wrap="square"/>
@@ -4553,7 +4624,7 @@
                   </a:tcPr>
                 </a:tc>
               </a:tr>
-              <a:tr h="457200">
+              <a:tr h="448056">
                 <a:tc>
                   <a:txBody>
                     <a:bodyPr wrap="square"/>
@@ -4651,7 +4722,7 @@
                   </a:tcPr>
                 </a:tc>
               </a:tr>
-              <a:tr h="457200">
+              <a:tr h="448056">
                 <a:tc>
                   <a:txBody>
                     <a:bodyPr wrap="square"/>
@@ -4749,7 +4820,7 @@
                   </a:tcPr>
                 </a:tc>
               </a:tr>
-              <a:tr h="457200">
+              <a:tr h="448056">
                 <a:tc>
                   <a:txBody>
                     <a:bodyPr wrap="square"/>
@@ -4847,7 +4918,7 @@
                   </a:tcPr>
                 </a:tc>
               </a:tr>
-              <a:tr h="457200">
+              <a:tr h="448056">
                 <a:tc>
                   <a:txBody>
                     <a:bodyPr wrap="square"/>
@@ -4945,7 +5016,7 @@
                   </a:tcPr>
                 </a:tc>
               </a:tr>
-              <a:tr h="457200">
+              <a:tr h="448056">
                 <a:tc>
                   <a:txBody>
                     <a:bodyPr wrap="square"/>
@@ -5105,7 +5176,7 @@
                 <a:latin typeface="Segoe UI"/>
                 <a:ea typeface="微软雅黑"/>
               </a:rPr>
-              <a:t>若要求逐用例硬超时，则保留 方案C，并引入常驻连接服务。</a:t>
+              <a:t>当前 ATE 采用 方案C（逐用例多进程）；若要求逐用例硬超时，则保留 方案C，并引入常驻连接服务。</a:t>
             </a:r>
           </a:p>
         </p:txBody>
@@ -5146,6 +5217,48 @@
           </a:p>
         </p:txBody>
       </p:sp>
+    </p:spTree>
+  </p:cSld>
+  <p:clrMapOvr>
+    <a:masterClrMapping/>
+  </p:clrMapOvr>
+</p:sld>
+</file>
+
+<file path=ppt/slides/slide3.xml><?xml version="1.0" encoding="utf-8"?>
+<p:sld xmlns:a="http://schemas.openxmlformats.org/drawingml/2006/main" xmlns:p="http://schemas.openxmlformats.org/presentationml/2006/main" xmlns:r="http://schemas.openxmlformats.org/officeDocument/2006/relationships">
+  <p:cSld>
+    <p:spTree>
+      <p:nvGrpSpPr>
+        <p:cNvPr id="1" name=""/>
+        <p:cNvGrpSpPr/>
+        <p:nvPr/>
+      </p:nvGrpSpPr>
+      <p:grpSpPr/>
+      <p:pic>
+        <p:nvPicPr>
+          <p:cNvPr id="2" name="Picture 1" descr="各方案潜在问题.png"/>
+          <p:cNvPicPr>
+            <a:picLocks noChangeAspect="1"/>
+          </p:cNvPicPr>
+          <p:nvPr/>
+        </p:nvPicPr>
+        <p:blipFill>
+          <a:blip r:embed="rId2"/>
+          <a:stretch>
+            <a:fillRect/>
+          </a:stretch>
+        </p:blipFill>
+        <p:spPr>
+          <a:xfrm>
+            <a:off x="0" y="0"/>
+            <a:ext cx="12188952" cy="6858000"/>
+          </a:xfrm>
+          <a:prstGeom prst="rect">
+            <a:avLst/>
+          </a:prstGeom>
+        </p:spPr>
+      </p:pic>
     </p:spTree>
   </p:cSld>
   <p:clrMapOvr>

--- a/docs/测试执行方案.pptx
+++ b/docs/测试执行方案.pptx
@@ -8,6 +8,7 @@
     <p:sldId id="256" r:id="rId7"/>
     <p:sldId id="257" r:id="rId9"/>
     <p:sldId id="258" r:id="rId10"/>
+    <p:sldId id="259" r:id="rId11"/>
   </p:sldIdLst>
   <p:sldSz cx="12188952" cy="6858000" type="screen4x3"/>
   <p:notesSz cx="6858000" cy="9144000"/>
@@ -504,7 +505,7 @@
           <a:lstStyle/>
           <a:p>
             <a:r>
-              <a:t>两项问题均由执行粒度（每条用例一个独立进程）引起，与是否使用 pytest 无直接因果关系。决策前提为可接受单条用例占用测试台。结论方向：采用段内单进程执行，以同进程复用连接与状态，并借助进程内看门狗实现单用例超时中断。</a:t>
+              <a:t>逻辑视图：三方案共用编排层（Runner 读取 tps.json 清单）与被测对象（测试台/仪器），差异集中在执行容器与设备连接。方案A 为单 pytest 进程、整段一次执行、连接进程内复用；方案B 不经过 pytest，由 Runner 进程内直接调用用例函数；方案C 为 ATE 现状，每条用例一个独立 pytest 进程，连接随进程重复建立。</a:t>
             </a:r>
           </a:p>
         </p:txBody>
@@ -574,7 +575,7 @@
           <a:lstStyle/>
           <a:p>
             <a:r>
-              <a:t>方案A 指整份或分段一次 pytest 执行；方案B 指完全绕开 pytest、由 Runner 顺序调用用例函数；方案C 为现状，即每条用例一个独立 pytest 进程。方案A 与方案C 均在连接复用与故障隔离之间取舍；在可接受单条用例占用测试台的前提下推荐方案A。</a:t>
+              <a:t>两项问题均由执行粒度（每条用例一个独立进程）引起，与是否使用 pytest 无直接因果关系。决策前提为可接受单条用例占用测试台。结论方向：采用段内单进程执行，以同进程复用连接与状态，并借助进程内看门狗实现单用例超时中断。</a:t>
             </a:r>
           </a:p>
         </p:txBody>
@@ -600,6 +601,76 @@
 </file>
 
 <file path=ppt/notesSlides/notesSlide3.xml><?xml version="1.0" encoding="utf-8"?>
+<p:notes xmlns:a="http://schemas.openxmlformats.org/drawingml/2006/main" xmlns:p="http://schemas.openxmlformats.org/presentationml/2006/main" xmlns:r="http://schemas.openxmlformats.org/officeDocument/2006/relationships">
+  <p:cSld>
+    <p:spTree>
+      <p:nvGrpSpPr>
+        <p:cNvPr id="1" name=""/>
+        <p:cNvGrpSpPr/>
+        <p:nvPr/>
+      </p:nvGrpSpPr>
+      <p:grpSpPr>
+        <a:xfrm>
+          <a:off x="0" y="0"/>
+          <a:ext cx="0" cy="0"/>
+          <a:chOff x="0" y="0"/>
+          <a:chExt cx="0" cy="0"/>
+        </a:xfrm>
+      </p:grpSpPr>
+      <p:sp>
+        <p:nvSpPr>
+          <p:cNvPr id="2" name="Slide Image Placeholder 1"/>
+          <p:cNvSpPr>
+            <a:spLocks noGrp="1"/>
+          </p:cNvSpPr>
+          <p:nvPr>
+            <p:ph type="sldImg" idx="2"/>
+          </p:nvPr>
+        </p:nvSpPr>
+        <p:spPr/>
+      </p:sp>
+      <p:sp>
+        <p:nvSpPr>
+          <p:cNvPr id="3" name="Notes Placeholder 2"/>
+          <p:cNvSpPr>
+            <a:spLocks noGrp="1"/>
+          </p:cNvSpPr>
+          <p:nvPr>
+            <p:ph type="body" idx="3" sz="quarter"/>
+          </p:nvPr>
+        </p:nvSpPr>
+        <p:spPr/>
+        <p:txBody>
+          <a:bodyPr/>
+          <a:lstStyle/>
+          <a:p>
+            <a:r>
+              <a:t>方案A 指整份或分段一次 pytest 执行；方案B 指完全绕开 pytest、由 Runner 顺序调用用例函数；方案C 为现状，即每条用例一个独立 pytest 进程。方案A 与方案C 均在连接复用与故障隔离之间取舍；在可接受单条用例占用测试台的前提下推荐方案A。</a:t>
+            </a:r>
+          </a:p>
+        </p:txBody>
+      </p:sp>
+      <p:sp>
+        <p:nvSpPr>
+          <p:cNvPr id="4" name="Slide Number Placeholder 3"/>
+          <p:cNvSpPr>
+            <a:spLocks noGrp="1"/>
+          </p:cNvSpPr>
+          <p:nvPr>
+            <p:ph type="sldNum" idx="5" sz="quarter"/>
+          </p:nvPr>
+        </p:nvSpPr>
+        <p:spPr/>
+      </p:sp>
+    </p:spTree>
+  </p:cSld>
+  <p:clrMapOvr>
+    <a:masterClrMapping/>
+  </p:clrMapOvr>
+</p:notes>
+</file>
+
+<file path=ppt/notesSlides/notesSlide4.xml><?xml version="1.0" encoding="utf-8"?>
 <p:notes xmlns:a="http://schemas.openxmlformats.org/drawingml/2006/main" xmlns:p="http://schemas.openxmlformats.org/presentationml/2006/main" xmlns:r="http://schemas.openxmlformats.org/officeDocument/2006/relationships">
   <p:cSld>
     <p:spTree>
@@ -3646,7 +3717,7 @@
     <p:bg>
       <p:bgPr>
         <a:solidFill>
-          <a:srgbClr val="101C2A"/>
+          <a:srgbClr val="FFFFFF"/>
         </a:solidFill>
         <a:effectLst/>
       </p:bgPr>
@@ -3660,99 +3731,23 @@
       <p:grpSpPr/>
       <p:sp>
         <p:nvSpPr>
-          <p:cNvPr id="2" name="TextBox 1"/>
-          <p:cNvSpPr txBox="1"/>
+          <p:cNvPr id="2" name="Rectangle 1"/>
+          <p:cNvSpPr/>
           <p:nvPr/>
         </p:nvSpPr>
         <p:spPr>
           <a:xfrm>
-            <a:off x="548640" y="457200"/>
-            <a:ext cx="11091672" cy="822960"/>
+            <a:off x="0" y="0"/>
+            <a:ext cx="12188952" cy="841248"/>
           </a:xfrm>
           <a:prstGeom prst="rect">
             <a:avLst/>
           </a:prstGeom>
-          <a:noFill/>
-        </p:spPr>
-        <p:txBody>
-          <a:bodyPr wrap="square" anchor="t" lIns="0" rIns="0" tIns="0" bIns="0">
-            <a:spAutoFit/>
-          </a:bodyPr>
-          <a:lstStyle/>
-          <a:p>
-            <a:pPr algn="l"/>
-            <a:r>
-              <a:rPr sz="4000" b="1" i="0">
-                <a:solidFill>
-                  <a:srgbClr val="FFFFFF"/>
-                </a:solidFill>
-                <a:latin typeface="Segoe UI"/>
-                <a:ea typeface="微软雅黑"/>
-              </a:rPr>
-              <a:t>ATE 执行架构决策评审</a:t>
-            </a:r>
-          </a:p>
-        </p:txBody>
-      </p:sp>
-      <p:sp>
-        <p:nvSpPr>
-          <p:cNvPr id="3" name="TextBox 2"/>
-          <p:cNvSpPr txBox="1"/>
-          <p:nvPr/>
-        </p:nvSpPr>
-        <p:spPr>
-          <a:xfrm>
-            <a:off x="548640" y="1316736"/>
-            <a:ext cx="11091672" cy="457200"/>
-          </a:xfrm>
-          <a:prstGeom prst="rect">
-            <a:avLst/>
-          </a:prstGeom>
-          <a:noFill/>
-        </p:spPr>
-        <p:txBody>
-          <a:bodyPr wrap="square" anchor="t" lIns="0" rIns="0" tIns="0" bIns="0">
-            <a:spAutoFit/>
-          </a:bodyPr>
-          <a:lstStyle/>
-          <a:p>
-            <a:pPr algn="l"/>
-            <a:r>
-              <a:rPr sz="1700" b="0" i="0">
-                <a:solidFill>
-                  <a:srgbClr val="9DB0C2"/>
-                </a:solidFill>
-                <a:latin typeface="Segoe UI"/>
-                <a:ea typeface="微软雅黑"/>
-              </a:rPr>
-              <a:t>执行粒度 · 用例间数据传递 · 设备连接复用</a:t>
-            </a:r>
-          </a:p>
-        </p:txBody>
-      </p:sp>
-      <p:sp>
-        <p:nvSpPr>
-          <p:cNvPr id="4" name="Rounded Rectangle 3"/>
-          <p:cNvSpPr/>
-          <p:nvPr/>
-        </p:nvSpPr>
-        <p:spPr>
-          <a:xfrm>
-            <a:off x="548640" y="1920240"/>
-            <a:ext cx="5317236" cy="2377440"/>
-          </a:xfrm>
-          <a:prstGeom prst="roundRect">
-            <a:avLst>
-              <a:gd name="adj" fmla="val 4500"/>
-            </a:avLst>
-          </a:prstGeom>
           <a:solidFill>
-            <a:srgbClr val="1C2C3E"/>
+            <a:srgbClr val="8B1A1A"/>
           </a:solidFill>
-          <a:ln w="12700">
-            <a:solidFill>
-              <a:srgbClr val="2C4056"/>
-            </a:solidFill>
+          <a:ln>
+            <a:noFill/>
           </a:ln>
           <a:effectLst/>
         </p:spPr>
@@ -3771,318 +3766,99 @@
           </a:fontRef>
         </p:style>
         <p:txBody>
-          <a:bodyPr rtlCol="0" anchor="t" wrap="square" lIns="310896" rIns="310896" tIns="256032" bIns="256032"/>
-          <a:lstStyle/>
-          <a:p>
-            <a:pPr algn="l">
-              <a:spcAft>
-                <a:spcPts val="1400"/>
-              </a:spcAft>
-            </a:pPr>
-            <a:r>
-              <a:rPr sz="2000" b="1" i="0">
-                <a:solidFill>
-                  <a:srgbClr val="D98A2B"/>
-                </a:solidFill>
-                <a:latin typeface="Segoe UI"/>
-                <a:ea typeface="微软雅黑"/>
-              </a:rPr>
-              <a:t>问题一</a:t>
-            </a:r>
-            <a:r>
-              <a:rPr sz="2000" b="1" i="0">
+          <a:bodyPr rtlCol="0" anchor="ctr" wrap="none" lIns="548640" rIns="274320" tIns="0" bIns="0"/>
+          <a:lstStyle/>
+          <a:p>
+            <a:pPr algn="l"/>
+            <a:r>
+              <a:rPr sz="2800" b="1" i="0">
                 <a:solidFill>
                   <a:srgbClr val="FFFFFF"/>
                 </a:solidFill>
-                <a:latin typeface="Segoe UI"/>
+                <a:latin typeface="微软雅黑"/>
                 <a:ea typeface="微软雅黑"/>
               </a:rPr>
-              <a:t>　用例间数据传递</a:t>
-            </a:r>
-          </a:p>
-          <a:p>
-            <a:pPr algn="l">
-              <a:lnSpc>
-                <a:spcPct val="115000"/>
-              </a:lnSpc>
-              <a:spcAft>
-                <a:spcPts val="900"/>
-              </a:spcAft>
-            </a:pPr>
-            <a:r>
-              <a:rPr sz="1400" b="1" i="0">
-                <a:solidFill>
-                  <a:srgbClr val="FFFFFF"/>
-                </a:solidFill>
-                <a:latin typeface="Segoe UI"/>
-                <a:ea typeface="微软雅黑"/>
-              </a:rPr>
-              <a:t>现象</a:t>
-            </a:r>
-            <a:r>
-              <a:rPr sz="1400" b="0" i="0">
-                <a:solidFill>
-                  <a:srgbClr val="CBD7E2"/>
-                </a:solidFill>
-                <a:latin typeface="Segoe UI"/>
-                <a:ea typeface="微软雅黑"/>
-              </a:rPr>
-              <a:t>：每条用例运行于独立进程，跨进程仅可经 run_result.json 续写。</a:t>
-            </a:r>
-          </a:p>
-          <a:p>
-            <a:pPr algn="l">
-              <a:lnSpc>
-                <a:spcPct val="115000"/>
-              </a:lnSpc>
-            </a:pPr>
-            <a:r>
-              <a:rPr sz="1400" b="1" i="0">
-                <a:solidFill>
-                  <a:srgbClr val="FFFFFF"/>
-                </a:solidFill>
-                <a:latin typeface="Segoe UI"/>
-                <a:ea typeface="微软雅黑"/>
-              </a:rPr>
-              <a:t>缺口</a:t>
-            </a:r>
-            <a:r>
-              <a:rPr sz="1400" b="0" i="0">
-                <a:solidFill>
-                  <a:srgbClr val="CBD7E2"/>
-                </a:solidFill>
-                <a:latin typeface="Segoe UI"/>
-                <a:ea typeface="微软雅黑"/>
-              </a:rPr>
-              <a:t>：缺少正式的状态通道，前序用例的测量值难以传递到后续用例。</a:t>
-            </a:r>
-          </a:p>
-        </p:txBody>
-      </p:sp>
-      <p:sp>
-        <p:nvSpPr>
-          <p:cNvPr id="5" name="Rounded Rectangle 4"/>
-          <p:cNvSpPr/>
+              <a:t>三个执行方案 · 逻辑视图</a:t>
+            </a:r>
+          </a:p>
+        </p:txBody>
+      </p:sp>
+      <p:sp>
+        <p:nvSpPr>
+          <p:cNvPr id="3" name="TextBox 2"/>
+          <p:cNvSpPr txBox="1"/>
           <p:nvPr/>
         </p:nvSpPr>
         <p:spPr>
           <a:xfrm>
-            <a:off x="6323076" y="1920240"/>
-            <a:ext cx="5317236" cy="2377440"/>
+            <a:off x="548640" y="914400"/>
+            <a:ext cx="11091672" cy="384048"/>
           </a:xfrm>
-          <a:prstGeom prst="roundRect">
-            <a:avLst>
-              <a:gd name="adj" fmla="val 4500"/>
-            </a:avLst>
+          <a:prstGeom prst="rect">
+            <a:avLst/>
           </a:prstGeom>
           <a:solidFill>
-            <a:srgbClr val="1C2C3E"/>
+            <a:srgbClr val="EDEDED"/>
           </a:solidFill>
-          <a:ln w="12700">
-            <a:solidFill>
-              <a:srgbClr val="2C4056"/>
-            </a:solidFill>
+          <a:ln>
+            <a:noFill/>
           </a:ln>
           <a:effectLst/>
         </p:spPr>
-        <p:style>
-          <a:lnRef idx="1">
-            <a:schemeClr val="accent1"/>
-          </a:lnRef>
-          <a:fillRef idx="3">
-            <a:schemeClr val="accent1"/>
-          </a:fillRef>
-          <a:effectRef idx="2">
-            <a:schemeClr val="accent1"/>
-          </a:effectRef>
-          <a:fontRef idx="minor">
-            <a:schemeClr val="lt1"/>
-          </a:fontRef>
-        </p:style>
-        <p:txBody>
-          <a:bodyPr rtlCol="0" anchor="t" wrap="square" lIns="310896" rIns="310896" tIns="256032" bIns="256032"/>
-          <a:lstStyle/>
-          <a:p>
-            <a:pPr algn="l">
-              <a:spcAft>
-                <a:spcPts val="1400"/>
-              </a:spcAft>
-            </a:pPr>
-            <a:r>
-              <a:rPr sz="2000" b="1" i="0">
+        <p:txBody>
+          <a:bodyPr wrap="square" anchor="ctr" lIns="128016" rIns="128016" tIns="0" bIns="0">
+            <a:spAutoFit/>
+          </a:bodyPr>
+          <a:lstStyle/>
+          <a:p>
+            <a:pPr algn="l"/>
+            <a:r>
+              <a:rPr sz="1300" b="0" i="0">
                 <a:solidFill>
-                  <a:srgbClr val="D98A2B"/>
+                  <a:srgbClr val="5B6B7A"/>
                 </a:solidFill>
-                <a:latin typeface="Segoe UI"/>
+                <a:latin typeface="微软雅黑"/>
                 <a:ea typeface="微软雅黑"/>
               </a:rPr>
-              <a:t>问题二</a:t>
-            </a:r>
-            <a:r>
-              <a:rPr sz="2000" b="1" i="0">
-                <a:solidFill>
-                  <a:srgbClr val="FFFFFF"/>
-                </a:solidFill>
-                <a:latin typeface="Segoe UI"/>
-                <a:ea typeface="微软雅黑"/>
-              </a:rPr>
-              <a:t>　设备连接重复建立</a:t>
-            </a:r>
-          </a:p>
-          <a:p>
-            <a:pPr algn="l">
-              <a:lnSpc>
-                <a:spcPct val="115000"/>
-              </a:lnSpc>
-              <a:spcAft>
-                <a:spcPts val="900"/>
-              </a:spcAft>
-            </a:pPr>
-            <a:r>
-              <a:rPr sz="1400" b="1" i="0">
-                <a:solidFill>
-                  <a:srgbClr val="FFFFFF"/>
-                </a:solidFill>
-                <a:latin typeface="Segoe UI"/>
-                <a:ea typeface="微软雅黑"/>
-              </a:rPr>
-              <a:t>现象</a:t>
-            </a:r>
-            <a:r>
-              <a:rPr sz="1400" b="0" i="0">
-                <a:solidFill>
-                  <a:srgbClr val="CBD7E2"/>
-                </a:solidFill>
-                <a:latin typeface="Segoe UI"/>
-                <a:ea typeface="微软雅黑"/>
-              </a:rPr>
-              <a:t>：驱动在用例进程内惰性建连，进程结束即随进程断开。</a:t>
-            </a:r>
-          </a:p>
-          <a:p>
-            <a:pPr algn="l">
-              <a:lnSpc>
-                <a:spcPct val="115000"/>
-              </a:lnSpc>
-            </a:pPr>
-            <a:r>
-              <a:rPr sz="1400" b="1" i="0">
-                <a:solidFill>
-                  <a:srgbClr val="FFFFFF"/>
-                </a:solidFill>
-                <a:latin typeface="Segoe UI"/>
-                <a:ea typeface="微软雅黑"/>
-              </a:rPr>
-              <a:t>影响</a:t>
-            </a:r>
-            <a:r>
-              <a:rPr sz="1400" b="0" i="0">
-                <a:solidFill>
-                  <a:srgbClr val="CBD7E2"/>
-                </a:solidFill>
-                <a:latin typeface="Segoe UI"/>
-                <a:ea typeface="微软雅黑"/>
-              </a:rPr>
-              <a:t>：每条用例重复建连，串口握手与仪器自检开销显著。</a:t>
-            </a:r>
-          </a:p>
-        </p:txBody>
-      </p:sp>
-      <p:sp>
-        <p:nvSpPr>
-          <p:cNvPr id="6" name="Rounded Rectangle 5"/>
-          <p:cNvSpPr/>
+              <a:t>关键词：艾因柯蓝</a:t>
+            </a:r>
+          </a:p>
+        </p:txBody>
+      </p:sp>
+      <p:pic>
+        <p:nvPicPr>
+          <p:cNvPr id="4" name="Picture 3" descr="三方案逻辑视图.png"/>
+          <p:cNvPicPr>
+            <a:picLocks noChangeAspect="1"/>
+          </p:cNvPicPr>
           <p:nvPr/>
-        </p:nvSpPr>
+        </p:nvPicPr>
+        <p:blipFill>
+          <a:blip r:embed="rId2"/>
+          <a:stretch>
+            <a:fillRect/>
+          </a:stretch>
+        </p:blipFill>
         <p:spPr>
           <a:xfrm>
-            <a:off x="548640" y="4526280"/>
-            <a:ext cx="11091672" cy="1188720"/>
+            <a:off x="548640" y="1572768"/>
+            <a:ext cx="11091672" cy="4667745"/>
           </a:xfrm>
-          <a:prstGeom prst="roundRect">
-            <a:avLst>
-              <a:gd name="adj" fmla="val 9000"/>
-            </a:avLst>
+          <a:prstGeom prst="rect">
+            <a:avLst/>
           </a:prstGeom>
-          <a:solidFill>
-            <a:srgbClr val="16283A"/>
-          </a:solidFill>
-          <a:ln w="15875">
-            <a:solidFill>
-              <a:srgbClr val="D98A2B"/>
-            </a:solidFill>
-          </a:ln>
-          <a:effectLst/>
         </p:spPr>
-        <p:style>
-          <a:lnRef idx="1">
-            <a:schemeClr val="accent1"/>
-          </a:lnRef>
-          <a:fillRef idx="3">
-            <a:schemeClr val="accent1"/>
-          </a:fillRef>
-          <a:effectRef idx="2">
-            <a:schemeClr val="accent1"/>
-          </a:effectRef>
-          <a:fontRef idx="minor">
-            <a:schemeClr val="lt1"/>
-          </a:fontRef>
-        </p:style>
-        <p:txBody>
-          <a:bodyPr rtlCol="0" anchor="ctr" wrap="square" lIns="329184" rIns="329184" tIns="182880" bIns="182880"/>
-          <a:lstStyle/>
-          <a:p>
-            <a:pPr algn="l">
-              <a:spcAft>
-                <a:spcPts val="600"/>
-              </a:spcAft>
-            </a:pPr>
-            <a:r>
-              <a:rPr sz="1500" b="1" i="0">
-                <a:solidFill>
-                  <a:srgbClr val="D98A2B"/>
-                </a:solidFill>
-                <a:latin typeface="Segoe UI"/>
-                <a:ea typeface="微软雅黑"/>
-              </a:rPr>
-              <a:t>决策方向　</a:t>
-            </a:r>
-            <a:r>
-              <a:rPr sz="1500" b="1" i="0">
-                <a:solidFill>
-                  <a:srgbClr val="FFFFFF"/>
-                </a:solidFill>
-                <a:latin typeface="Segoe UI"/>
-                <a:ea typeface="微软雅黑"/>
-              </a:rPr>
-              <a:t>在可接受「单条用例占用测试台」的前提下，采用段内单进程执行。</a:t>
-            </a:r>
-          </a:p>
-          <a:p>
-            <a:pPr algn="l"/>
-            <a:r>
-              <a:rPr sz="1400" b="0" i="0">
-                <a:solidFill>
-                  <a:srgbClr val="9DB0C2"/>
-                </a:solidFill>
-                <a:latin typeface="Segoe UI"/>
-                <a:ea typeface="微软雅黑"/>
-              </a:rPr>
-              <a:t>连接与状态由同进程天然复用；配合进程内看门狗，实现单用例超时中断。</a:t>
-            </a:r>
-          </a:p>
-        </p:txBody>
-      </p:sp>
-      <p:sp>
-        <p:nvSpPr>
-          <p:cNvPr id="7" name="TextBox 6"/>
+      </p:pic>
+      <p:sp>
+        <p:nvSpPr>
+          <p:cNvPr id="5" name="TextBox 4"/>
           <p:cNvSpPr txBox="1"/>
           <p:nvPr/>
         </p:nvSpPr>
         <p:spPr>
           <a:xfrm>
-            <a:off x="548640" y="6053328"/>
-            <a:ext cx="11091672" cy="347472"/>
+            <a:off x="548640" y="6355080"/>
+            <a:ext cx="11091672" cy="310896"/>
           </a:xfrm>
           <a:prstGeom prst="rect">
             <a:avLst/>
@@ -4099,12 +3875,12 @@
             <a:r>
               <a:rPr sz="1200" b="0" i="0">
                 <a:solidFill>
-                  <a:srgbClr val="6E8296"/>
+                  <a:srgbClr val="5B6B7A"/>
                 </a:solidFill>
                 <a:latin typeface="Segoe UI"/>
                 <a:ea typeface="微软雅黑"/>
               </a:rPr>
-              <a:t>评估依据：backend/tps_runtime（workspace / manifest / templates / conftest 模板）、backend/drivers/transport.py</a:t>
+              <a:t>说明：三方案均以 tps.json 清单为编排入口，差异在于执行容器的进程边界与设备连接的复用方式。</a:t>
             </a:r>
           </a:p>
         </p:txBody>
@@ -4137,49 +3913,452 @@
       <p:grpSpPr/>
       <p:sp>
         <p:nvSpPr>
-          <p:cNvPr id="2" name="TextBox 1"/>
-          <p:cNvSpPr txBox="1"/>
+          <p:cNvPr id="2" name="Rectangle 1"/>
+          <p:cNvSpPr/>
           <p:nvPr/>
         </p:nvSpPr>
         <p:spPr>
           <a:xfrm>
-            <a:off x="548640" y="365760"/>
-            <a:ext cx="11091672" cy="566928"/>
+            <a:off x="0" y="0"/>
+            <a:ext cx="12188952" cy="841248"/>
           </a:xfrm>
           <a:prstGeom prst="rect">
             <a:avLst/>
           </a:prstGeom>
-          <a:noFill/>
+          <a:solidFill>
+            <a:srgbClr val="8B1A1A"/>
+          </a:solidFill>
+          <a:ln>
+            <a:noFill/>
+          </a:ln>
+          <a:effectLst/>
         </p:spPr>
-        <p:txBody>
-          <a:bodyPr wrap="square" anchor="t" lIns="0" rIns="0" tIns="0" bIns="0">
+        <p:style>
+          <a:lnRef idx="1">
+            <a:schemeClr val="accent1"/>
+          </a:lnRef>
+          <a:fillRef idx="3">
+            <a:schemeClr val="accent1"/>
+          </a:fillRef>
+          <a:effectRef idx="2">
+            <a:schemeClr val="accent1"/>
+          </a:effectRef>
+          <a:fontRef idx="minor">
+            <a:schemeClr val="lt1"/>
+          </a:fontRef>
+        </p:style>
+        <p:txBody>
+          <a:bodyPr rtlCol="0" anchor="ctr" wrap="none" lIns="548640" rIns="274320" tIns="0" bIns="0"/>
+          <a:lstStyle/>
+          <a:p>
+            <a:pPr algn="l"/>
+            <a:r>
+              <a:rPr sz="2800" b="1" i="0">
+                <a:solidFill>
+                  <a:srgbClr val="FFFFFF"/>
+                </a:solidFill>
+                <a:latin typeface="微软雅黑"/>
+                <a:ea typeface="微软雅黑"/>
+              </a:rPr>
+              <a:t>ATE 执行架构决策评审</a:t>
+            </a:r>
+          </a:p>
+        </p:txBody>
+      </p:sp>
+      <p:sp>
+        <p:nvSpPr>
+          <p:cNvPr id="3" name="TextBox 2"/>
+          <p:cNvSpPr txBox="1"/>
+          <p:nvPr/>
+        </p:nvSpPr>
+        <p:spPr>
+          <a:xfrm>
+            <a:off x="548640" y="914400"/>
+            <a:ext cx="11091672" cy="384048"/>
+          </a:xfrm>
+          <a:prstGeom prst="rect">
+            <a:avLst/>
+          </a:prstGeom>
+          <a:solidFill>
+            <a:srgbClr val="EDEDED"/>
+          </a:solidFill>
+          <a:ln>
+            <a:noFill/>
+          </a:ln>
+          <a:effectLst/>
+        </p:spPr>
+        <p:txBody>
+          <a:bodyPr wrap="square" anchor="ctr" lIns="128016" rIns="128016" tIns="0" bIns="0">
             <a:spAutoFit/>
           </a:bodyPr>
           <a:lstStyle/>
           <a:p>
             <a:pPr algn="l"/>
             <a:r>
-              <a:rPr sz="3400" b="1" i="0">
+              <a:rPr sz="1300" b="0" i="0">
+                <a:solidFill>
+                  <a:srgbClr val="5B6B7A"/>
+                </a:solidFill>
+                <a:latin typeface="微软雅黑"/>
+                <a:ea typeface="微软雅黑"/>
+              </a:rPr>
+              <a:t>执行粒度 · 用例间数据传递 · 设备连接复用</a:t>
+            </a:r>
+          </a:p>
+        </p:txBody>
+      </p:sp>
+      <p:sp>
+        <p:nvSpPr>
+          <p:cNvPr id="4" name="Rounded Rectangle 3"/>
+          <p:cNvSpPr/>
+          <p:nvPr/>
+        </p:nvSpPr>
+        <p:spPr>
+          <a:xfrm>
+            <a:off x="548640" y="1572768"/>
+            <a:ext cx="5317236" cy="2487168"/>
+          </a:xfrm>
+          <a:prstGeom prst="roundRect">
+            <a:avLst>
+              <a:gd name="adj" fmla="val 4500"/>
+            </a:avLst>
+          </a:prstGeom>
+          <a:solidFill>
+            <a:srgbClr val="F7F9FA"/>
+          </a:solidFill>
+          <a:ln w="12700">
+            <a:solidFill>
+              <a:srgbClr val="E2E8EA"/>
+            </a:solidFill>
+          </a:ln>
+          <a:effectLst/>
+        </p:spPr>
+        <p:style>
+          <a:lnRef idx="1">
+            <a:schemeClr val="accent1"/>
+          </a:lnRef>
+          <a:fillRef idx="3">
+            <a:schemeClr val="accent1"/>
+          </a:fillRef>
+          <a:effectRef idx="2">
+            <a:schemeClr val="accent1"/>
+          </a:effectRef>
+          <a:fontRef idx="minor">
+            <a:schemeClr val="lt1"/>
+          </a:fontRef>
+        </p:style>
+        <p:txBody>
+          <a:bodyPr rtlCol="0" anchor="t" wrap="square" lIns="274320" rIns="274320" tIns="237744" bIns="237744"/>
+          <a:lstStyle/>
+          <a:p>
+            <a:pPr algn="l">
+              <a:spcAft>
+                <a:spcPts val="1400"/>
+              </a:spcAft>
+            </a:pPr>
+            <a:r>
+              <a:rPr sz="2000" b="1" i="0">
+                <a:solidFill>
+                  <a:srgbClr val="8B1A1A"/>
+                </a:solidFill>
+                <a:latin typeface="Segoe UI"/>
+                <a:ea typeface="微软雅黑"/>
+              </a:rPr>
+              <a:t>问题一</a:t>
+            </a:r>
+            <a:r>
+              <a:rPr sz="2000" b="1" i="0">
                 <a:solidFill>
                   <a:srgbClr val="16222E"/>
                 </a:solidFill>
                 <a:latin typeface="Segoe UI"/>
                 <a:ea typeface="微软雅黑"/>
               </a:rPr>
-              <a:t>三种执行方案对比</a:t>
-            </a:r>
-          </a:p>
-        </p:txBody>
-      </p:sp>
-      <p:sp>
-        <p:nvSpPr>
-          <p:cNvPr id="3" name="TextBox 2"/>
+              <a:t>　用例间数据传递</a:t>
+            </a:r>
+          </a:p>
+          <a:p>
+            <a:pPr algn="l">
+              <a:lnSpc>
+                <a:spcPct val="115000"/>
+              </a:lnSpc>
+              <a:spcAft>
+                <a:spcPts val="900"/>
+              </a:spcAft>
+            </a:pPr>
+            <a:r>
+              <a:rPr sz="1400" b="1" i="0">
+                <a:solidFill>
+                  <a:srgbClr val="16222E"/>
+                </a:solidFill>
+                <a:latin typeface="Segoe UI"/>
+                <a:ea typeface="微软雅黑"/>
+              </a:rPr>
+              <a:t>现象</a:t>
+            </a:r>
+            <a:r>
+              <a:rPr sz="1400" b="0" i="0">
+                <a:solidFill>
+                  <a:srgbClr val="5B6B7A"/>
+                </a:solidFill>
+                <a:latin typeface="Segoe UI"/>
+                <a:ea typeface="微软雅黑"/>
+              </a:rPr>
+              <a:t>：每条用例运行于独立进程，跨进程仅可经 run_result.json 续写。</a:t>
+            </a:r>
+          </a:p>
+          <a:p>
+            <a:pPr algn="l">
+              <a:lnSpc>
+                <a:spcPct val="115000"/>
+              </a:lnSpc>
+            </a:pPr>
+            <a:r>
+              <a:rPr sz="1400" b="1" i="0">
+                <a:solidFill>
+                  <a:srgbClr val="16222E"/>
+                </a:solidFill>
+                <a:latin typeface="Segoe UI"/>
+                <a:ea typeface="微软雅黑"/>
+              </a:rPr>
+              <a:t>缺口</a:t>
+            </a:r>
+            <a:r>
+              <a:rPr sz="1400" b="0" i="0">
+                <a:solidFill>
+                  <a:srgbClr val="5B6B7A"/>
+                </a:solidFill>
+                <a:latin typeface="Segoe UI"/>
+                <a:ea typeface="微软雅黑"/>
+              </a:rPr>
+              <a:t>：缺少正式的状态通道，前序用例的测量值难以传递到后续用例。</a:t>
+            </a:r>
+          </a:p>
+        </p:txBody>
+      </p:sp>
+      <p:sp>
+        <p:nvSpPr>
+          <p:cNvPr id="5" name="Rounded Rectangle 4"/>
+          <p:cNvSpPr/>
+          <p:nvPr/>
+        </p:nvSpPr>
+        <p:spPr>
+          <a:xfrm>
+            <a:off x="6323076" y="1572768"/>
+            <a:ext cx="5317236" cy="2487168"/>
+          </a:xfrm>
+          <a:prstGeom prst="roundRect">
+            <a:avLst>
+              <a:gd name="adj" fmla="val 4500"/>
+            </a:avLst>
+          </a:prstGeom>
+          <a:solidFill>
+            <a:srgbClr val="F7F9FA"/>
+          </a:solidFill>
+          <a:ln w="12700">
+            <a:solidFill>
+              <a:srgbClr val="E2E8EA"/>
+            </a:solidFill>
+          </a:ln>
+          <a:effectLst/>
+        </p:spPr>
+        <p:style>
+          <a:lnRef idx="1">
+            <a:schemeClr val="accent1"/>
+          </a:lnRef>
+          <a:fillRef idx="3">
+            <a:schemeClr val="accent1"/>
+          </a:fillRef>
+          <a:effectRef idx="2">
+            <a:schemeClr val="accent1"/>
+          </a:effectRef>
+          <a:fontRef idx="minor">
+            <a:schemeClr val="lt1"/>
+          </a:fontRef>
+        </p:style>
+        <p:txBody>
+          <a:bodyPr rtlCol="0" anchor="t" wrap="square" lIns="274320" rIns="274320" tIns="237744" bIns="237744"/>
+          <a:lstStyle/>
+          <a:p>
+            <a:pPr algn="l">
+              <a:spcAft>
+                <a:spcPts val="1400"/>
+              </a:spcAft>
+            </a:pPr>
+            <a:r>
+              <a:rPr sz="2000" b="1" i="0">
+                <a:solidFill>
+                  <a:srgbClr val="8B1A1A"/>
+                </a:solidFill>
+                <a:latin typeface="Segoe UI"/>
+                <a:ea typeface="微软雅黑"/>
+              </a:rPr>
+              <a:t>问题二</a:t>
+            </a:r>
+            <a:r>
+              <a:rPr sz="2000" b="1" i="0">
+                <a:solidFill>
+                  <a:srgbClr val="16222E"/>
+                </a:solidFill>
+                <a:latin typeface="Segoe UI"/>
+                <a:ea typeface="微软雅黑"/>
+              </a:rPr>
+              <a:t>　设备连接重复建立</a:t>
+            </a:r>
+          </a:p>
+          <a:p>
+            <a:pPr algn="l">
+              <a:lnSpc>
+                <a:spcPct val="115000"/>
+              </a:lnSpc>
+              <a:spcAft>
+                <a:spcPts val="900"/>
+              </a:spcAft>
+            </a:pPr>
+            <a:r>
+              <a:rPr sz="1400" b="1" i="0">
+                <a:solidFill>
+                  <a:srgbClr val="16222E"/>
+                </a:solidFill>
+                <a:latin typeface="Segoe UI"/>
+                <a:ea typeface="微软雅黑"/>
+              </a:rPr>
+              <a:t>现象</a:t>
+            </a:r>
+            <a:r>
+              <a:rPr sz="1400" b="0" i="0">
+                <a:solidFill>
+                  <a:srgbClr val="5B6B7A"/>
+                </a:solidFill>
+                <a:latin typeface="Segoe UI"/>
+                <a:ea typeface="微软雅黑"/>
+              </a:rPr>
+              <a:t>：驱动在用例进程内惰性建连，进程结束即随进程断开。</a:t>
+            </a:r>
+          </a:p>
+          <a:p>
+            <a:pPr algn="l">
+              <a:lnSpc>
+                <a:spcPct val="115000"/>
+              </a:lnSpc>
+            </a:pPr>
+            <a:r>
+              <a:rPr sz="1400" b="1" i="0">
+                <a:solidFill>
+                  <a:srgbClr val="16222E"/>
+                </a:solidFill>
+                <a:latin typeface="Segoe UI"/>
+                <a:ea typeface="微软雅黑"/>
+              </a:rPr>
+              <a:t>影响</a:t>
+            </a:r>
+            <a:r>
+              <a:rPr sz="1400" b="0" i="0">
+                <a:solidFill>
+                  <a:srgbClr val="5B6B7A"/>
+                </a:solidFill>
+                <a:latin typeface="Segoe UI"/>
+                <a:ea typeface="微软雅黑"/>
+              </a:rPr>
+              <a:t>：每条用例重复建连，串口握手与仪器自检开销显著。</a:t>
+            </a:r>
+          </a:p>
+        </p:txBody>
+      </p:sp>
+      <p:sp>
+        <p:nvSpPr>
+          <p:cNvPr id="6" name="Rounded Rectangle 5"/>
+          <p:cNvSpPr/>
+          <p:nvPr/>
+        </p:nvSpPr>
+        <p:spPr>
+          <a:xfrm>
+            <a:off x="548640" y="4297680"/>
+            <a:ext cx="11091672" cy="1417320"/>
+          </a:xfrm>
+          <a:prstGeom prst="roundRect">
+            <a:avLst>
+              <a:gd name="adj" fmla="val 8000"/>
+            </a:avLst>
+          </a:prstGeom>
+          <a:solidFill>
+            <a:srgbClr val="FDF3E3"/>
+          </a:solidFill>
+          <a:ln w="15875">
+            <a:solidFill>
+              <a:srgbClr val="8B1A1A"/>
+            </a:solidFill>
+          </a:ln>
+          <a:effectLst/>
+        </p:spPr>
+        <p:style>
+          <a:lnRef idx="1">
+            <a:schemeClr val="accent1"/>
+          </a:lnRef>
+          <a:fillRef idx="3">
+            <a:schemeClr val="accent1"/>
+          </a:fillRef>
+          <a:effectRef idx="2">
+            <a:schemeClr val="accent1"/>
+          </a:effectRef>
+          <a:fontRef idx="minor">
+            <a:schemeClr val="lt1"/>
+          </a:fontRef>
+        </p:style>
+        <p:txBody>
+          <a:bodyPr rtlCol="0" anchor="ctr" wrap="square" lIns="310896" rIns="310896" tIns="201168" bIns="201168"/>
+          <a:lstStyle/>
+          <a:p>
+            <a:pPr algn="l">
+              <a:spcAft>
+                <a:spcPts val="600"/>
+              </a:spcAft>
+            </a:pPr>
+            <a:r>
+              <a:rPr sz="1500" b="1" i="0">
+                <a:solidFill>
+                  <a:srgbClr val="8B1A1A"/>
+                </a:solidFill>
+                <a:latin typeface="Segoe UI"/>
+                <a:ea typeface="微软雅黑"/>
+              </a:rPr>
+              <a:t>决策方向　</a:t>
+            </a:r>
+            <a:r>
+              <a:rPr sz="1500" b="1" i="0">
+                <a:solidFill>
+                  <a:srgbClr val="16222E"/>
+                </a:solidFill>
+                <a:latin typeface="Segoe UI"/>
+                <a:ea typeface="微软雅黑"/>
+              </a:rPr>
+              <a:t>在可接受「单条用例占用测试台」的前提下，采用段内单进程执行。</a:t>
+            </a:r>
+          </a:p>
+          <a:p>
+            <a:pPr algn="l"/>
+            <a:r>
+              <a:rPr sz="1400" b="0" i="0">
+                <a:solidFill>
+                  <a:srgbClr val="5B6B7A"/>
+                </a:solidFill>
+                <a:latin typeface="Segoe UI"/>
+                <a:ea typeface="微软雅黑"/>
+              </a:rPr>
+              <a:t>连接与状态由同进程天然复用；配合进程内看门狗，实现单用例超时中断。</a:t>
+            </a:r>
+          </a:p>
+        </p:txBody>
+      </p:sp>
+      <p:sp>
+        <p:nvSpPr>
+          <p:cNvPr id="7" name="TextBox 6"/>
           <p:cNvSpPr txBox="1"/>
           <p:nvPr/>
         </p:nvSpPr>
         <p:spPr>
           <a:xfrm>
-            <a:off x="548640" y="969264"/>
+            <a:off x="548640" y="6355080"/>
             <a:ext cx="11091672" cy="310896"/>
           </a:xfrm>
           <a:prstGeom prst="rect">
@@ -4195,11 +4374,133 @@
           <a:p>
             <a:pPr algn="l"/>
             <a:r>
-              <a:rPr sz="1500" b="0" i="0">
+              <a:rPr sz="1200" b="0" i="0">
                 <a:solidFill>
                   <a:srgbClr val="5B6B7A"/>
                 </a:solidFill>
                 <a:latin typeface="Segoe UI"/>
+                <a:ea typeface="微软雅黑"/>
+              </a:rPr>
+              <a:t>评估依据：backend/tps_runtime（workspace / manifest / templates / conftest 模板）、backend/drivers/transport.py</a:t>
+            </a:r>
+          </a:p>
+        </p:txBody>
+      </p:sp>
+    </p:spTree>
+  </p:cSld>
+  <p:clrMapOvr>
+    <a:masterClrMapping/>
+  </p:clrMapOvr>
+</p:sld>
+</file>
+
+<file path=ppt/slides/slide3.xml><?xml version="1.0" encoding="utf-8"?>
+<p:sld xmlns:a="http://schemas.openxmlformats.org/drawingml/2006/main" xmlns:p="http://schemas.openxmlformats.org/presentationml/2006/main" xmlns:r="http://schemas.openxmlformats.org/officeDocument/2006/relationships">
+  <p:cSld>
+    <p:bg>
+      <p:bgPr>
+        <a:solidFill>
+          <a:srgbClr val="FFFFFF"/>
+        </a:solidFill>
+        <a:effectLst/>
+      </p:bgPr>
+    </p:bg>
+    <p:spTree>
+      <p:nvGrpSpPr>
+        <p:cNvPr id="1" name=""/>
+        <p:cNvGrpSpPr/>
+        <p:nvPr/>
+      </p:nvGrpSpPr>
+      <p:grpSpPr/>
+      <p:sp>
+        <p:nvSpPr>
+          <p:cNvPr id="2" name="Rectangle 1"/>
+          <p:cNvSpPr/>
+          <p:nvPr/>
+        </p:nvSpPr>
+        <p:spPr>
+          <a:xfrm>
+            <a:off x="0" y="0"/>
+            <a:ext cx="12188952" cy="841248"/>
+          </a:xfrm>
+          <a:prstGeom prst="rect">
+            <a:avLst/>
+          </a:prstGeom>
+          <a:solidFill>
+            <a:srgbClr val="8B1A1A"/>
+          </a:solidFill>
+          <a:ln>
+            <a:noFill/>
+          </a:ln>
+          <a:effectLst/>
+        </p:spPr>
+        <p:style>
+          <a:lnRef idx="1">
+            <a:schemeClr val="accent1"/>
+          </a:lnRef>
+          <a:fillRef idx="3">
+            <a:schemeClr val="accent1"/>
+          </a:fillRef>
+          <a:effectRef idx="2">
+            <a:schemeClr val="accent1"/>
+          </a:effectRef>
+          <a:fontRef idx="minor">
+            <a:schemeClr val="lt1"/>
+          </a:fontRef>
+        </p:style>
+        <p:txBody>
+          <a:bodyPr rtlCol="0" anchor="ctr" wrap="none" lIns="548640" rIns="274320" tIns="0" bIns="0"/>
+          <a:lstStyle/>
+          <a:p>
+            <a:pPr algn="l"/>
+            <a:r>
+              <a:rPr sz="2800" b="1" i="0">
+                <a:solidFill>
+                  <a:srgbClr val="FFFFFF"/>
+                </a:solidFill>
+                <a:latin typeface="微软雅黑"/>
+                <a:ea typeface="微软雅黑"/>
+              </a:rPr>
+              <a:t>三种执行方案对比</a:t>
+            </a:r>
+          </a:p>
+        </p:txBody>
+      </p:sp>
+      <p:sp>
+        <p:nvSpPr>
+          <p:cNvPr id="3" name="TextBox 2"/>
+          <p:cNvSpPr txBox="1"/>
+          <p:nvPr/>
+        </p:nvSpPr>
+        <p:spPr>
+          <a:xfrm>
+            <a:off x="548640" y="914400"/>
+            <a:ext cx="11091672" cy="384048"/>
+          </a:xfrm>
+          <a:prstGeom prst="rect">
+            <a:avLst/>
+          </a:prstGeom>
+          <a:solidFill>
+            <a:srgbClr val="EDEDED"/>
+          </a:solidFill>
+          <a:ln>
+            <a:noFill/>
+          </a:ln>
+          <a:effectLst/>
+        </p:spPr>
+        <p:txBody>
+          <a:bodyPr wrap="square" anchor="ctr" lIns="128016" rIns="128016" tIns="0" bIns="0">
+            <a:spAutoFit/>
+          </a:bodyPr>
+          <a:lstStyle/>
+          <a:p>
+            <a:pPr algn="l"/>
+            <a:r>
+              <a:rPr sz="1300" b="0" i="0">
+                <a:solidFill>
+                  <a:srgbClr val="5B6B7A"/>
+                </a:solidFill>
+                <a:latin typeface="微软雅黑"/>
                 <a:ea typeface="微软雅黑"/>
               </a:rPr>
               <a:t>评估对象：现有三条可选执行路线　·　当前 ATE 采用：方案C（逐用例多进程）</a:t>
@@ -4216,7 +4517,7 @@
           <p:nvPr/>
         </p:nvGraphicFramePr>
         <p:xfrm>
-          <a:off x="548640" y="1389888"/>
+          <a:off x="548640" y="1481328"/>
           <a:ext cx="11091672" cy="4206240"/>
         </p:xfrm>
         <a:graphic>
@@ -4253,7 +4554,7 @@
                   </a:txBody>
                   <a:tcPr marL="100584" marR="100584" marT="27432" marB="27432" anchor="ctr">
                     <a:solidFill>
-                      <a:srgbClr val="0E6E6E"/>
+                      <a:srgbClr val="8B1A1A"/>
                     </a:solidFill>
                   </a:tcPr>
                 </a:tc>
@@ -4301,7 +4602,7 @@
                   </a:txBody>
                   <a:tcPr marL="100584" marR="100584" marT="27432" marB="27432" anchor="ctr">
                     <a:solidFill>
-                      <a:srgbClr val="0E6E6E"/>
+                      <a:srgbClr val="8B1A1A"/>
                     </a:solidFill>
                   </a:tcPr>
                 </a:tc>
@@ -4325,7 +4626,7 @@
                   </a:txBody>
                   <a:tcPr marL="100584" marR="100584" marT="27432" marB="27432" anchor="ctr">
                     <a:solidFill>
-                      <a:srgbClr val="0E6E6E"/>
+                      <a:srgbClr val="8B1A1A"/>
                     </a:solidFill>
                   </a:tcPr>
                 </a:tc>
@@ -5148,7 +5449,7 @@
             <a:r>
               <a:rPr sz="1400" b="1" i="0">
                 <a:solidFill>
-                  <a:srgbClr val="D98A2B"/>
+                  <a:srgbClr val="8B1A1A"/>
                 </a:solidFill>
                 <a:latin typeface="Segoe UI"/>
                 <a:ea typeface="微软雅黑"/>
@@ -5189,8 +5490,8 @@
         </p:nvSpPr>
         <p:spPr>
           <a:xfrm>
-            <a:off x="548640" y="6492240"/>
-            <a:ext cx="11091672" cy="274320"/>
+            <a:off x="548640" y="6510528"/>
+            <a:ext cx="11091672" cy="256032"/>
           </a:xfrm>
           <a:prstGeom prst="rect">
             <a:avLst/>
@@ -5225,9 +5526,17 @@
 </p:sld>
 </file>
 
-<file path=ppt/slides/slide3.xml><?xml version="1.0" encoding="utf-8"?>
+<file path=ppt/slides/slide4.xml><?xml version="1.0" encoding="utf-8"?>
 <p:sld xmlns:a="http://schemas.openxmlformats.org/drawingml/2006/main" xmlns:p="http://schemas.openxmlformats.org/presentationml/2006/main" xmlns:r="http://schemas.openxmlformats.org/officeDocument/2006/relationships">
   <p:cSld>
+    <p:bg>
+      <p:bgPr>
+        <a:solidFill>
+          <a:srgbClr val="FFFFFF"/>
+        </a:solidFill>
+        <a:effectLst/>
+      </p:bgPr>
+    </p:bg>
     <p:spTree>
       <p:nvGrpSpPr>
         <p:cNvPr id="1" name=""/>
@@ -5235,9 +5544,105 @@
         <p:nvPr/>
       </p:nvGrpSpPr>
       <p:grpSpPr/>
+      <p:sp>
+        <p:nvSpPr>
+          <p:cNvPr id="2" name="Rectangle 1"/>
+          <p:cNvSpPr/>
+          <p:nvPr/>
+        </p:nvSpPr>
+        <p:spPr>
+          <a:xfrm>
+            <a:off x="0" y="0"/>
+            <a:ext cx="12188952" cy="841248"/>
+          </a:xfrm>
+          <a:prstGeom prst="rect">
+            <a:avLst/>
+          </a:prstGeom>
+          <a:solidFill>
+            <a:srgbClr val="8B1A1A"/>
+          </a:solidFill>
+          <a:ln>
+            <a:noFill/>
+          </a:ln>
+          <a:effectLst/>
+        </p:spPr>
+        <p:style>
+          <a:lnRef idx="1">
+            <a:schemeClr val="accent1"/>
+          </a:lnRef>
+          <a:fillRef idx="3">
+            <a:schemeClr val="accent1"/>
+          </a:fillRef>
+          <a:effectRef idx="2">
+            <a:schemeClr val="accent1"/>
+          </a:effectRef>
+          <a:fontRef idx="minor">
+            <a:schemeClr val="lt1"/>
+          </a:fontRef>
+        </p:style>
+        <p:txBody>
+          <a:bodyPr rtlCol="0" anchor="ctr" wrap="none" lIns="548640" rIns="274320" tIns="0" bIns="0"/>
+          <a:lstStyle/>
+          <a:p>
+            <a:pPr algn="l"/>
+            <a:r>
+              <a:rPr sz="2800" b="1" i="0">
+                <a:solidFill>
+                  <a:srgbClr val="FFFFFF"/>
+                </a:solidFill>
+                <a:latin typeface="微软雅黑"/>
+                <a:ea typeface="微软雅黑"/>
+              </a:rPr>
+              <a:t>各方案潜在问题对照</a:t>
+            </a:r>
+          </a:p>
+        </p:txBody>
+      </p:sp>
+      <p:sp>
+        <p:nvSpPr>
+          <p:cNvPr id="3" name="TextBox 2"/>
+          <p:cNvSpPr txBox="1"/>
+          <p:nvPr/>
+        </p:nvSpPr>
+        <p:spPr>
+          <a:xfrm>
+            <a:off x="548640" y="914400"/>
+            <a:ext cx="11091672" cy="384048"/>
+          </a:xfrm>
+          <a:prstGeom prst="rect">
+            <a:avLst/>
+          </a:prstGeom>
+          <a:solidFill>
+            <a:srgbClr val="EDEDED"/>
+          </a:solidFill>
+          <a:ln>
+            <a:noFill/>
+          </a:ln>
+          <a:effectLst/>
+        </p:spPr>
+        <p:txBody>
+          <a:bodyPr wrap="square" anchor="ctr" lIns="128016" rIns="128016" tIns="0" bIns="0">
+            <a:spAutoFit/>
+          </a:bodyPr>
+          <a:lstStyle/>
+          <a:p>
+            <a:pPr algn="l"/>
+            <a:r>
+              <a:rPr sz="1300" b="0" i="0">
+                <a:solidFill>
+                  <a:srgbClr val="5B6B7A"/>
+                </a:solidFill>
+                <a:latin typeface="微软雅黑"/>
+                <a:ea typeface="微软雅黑"/>
+              </a:rPr>
+              <a:t>故障隔离 · 硬超时 · 交互控制 · 数据传递 · 连接复用 · 判定口径</a:t>
+            </a:r>
+          </a:p>
+        </p:txBody>
+      </p:sp>
       <p:pic>
         <p:nvPicPr>
-          <p:cNvPr id="2" name="Picture 1" descr="各方案潜在问题.png"/>
+          <p:cNvPr id="4" name="Picture 3" descr="各方案潜在问题.png"/>
           <p:cNvPicPr>
             <a:picLocks noChangeAspect="1"/>
           </p:cNvPicPr>
@@ -5251,8 +5656,8 @@
         </p:blipFill>
         <p:spPr>
           <a:xfrm>
-            <a:off x="0" y="0"/>
-            <a:ext cx="12188952" cy="6858000"/>
+            <a:off x="1380235" y="1517904"/>
+            <a:ext cx="9428480" cy="5303520"/>
           </a:xfrm>
           <a:prstGeom prst="rect">
             <a:avLst/>

--- a/docs/测试执行方案.pptx
+++ b/docs/测试执行方案.pptx
@@ -505,7 +505,7 @@
           <a:lstStyle/>
           <a:p>
             <a:r>
-              <a:t>逻辑视图：三方案共用编排层（Runner 读取 tps.json 清单）与被测对象（测试台/仪器），差异集中在执行容器与设备连接。方案A 为单 pytest 进程、整段一次执行、连接进程内复用；方案B 不经过 pytest，由 Runner 进程内直接调用用例函数；方案C 为 ATE 现状，每条用例一个独立 pytest 进程，连接随进程重复建立。</a:t>
+              <a:t>逻辑视图：三方案共用编排层（Runner 读取 tps.json 清单）与被测对象（测试台/仪器），差异集中在执行容器与设备连接。参数化与注入路径：tps.json 的 device_config 提供设备连接参数，经 ate_env.json 下发至用例进程；mode（real / simulate）决定驱动工厂选用真实或仿真传输。方案A 为单 pytest 进程、整段一次执行、连接进程内复用；方案B 由 Runner 进程内直接调用用例函数；方案C 为 ATE 现状，每条用例一个独立 pytest 进程，连接随进程重复建立。</a:t>
             </a:r>
           </a:p>
         </p:txBody>
@@ -3731,49 +3731,37 @@
       <p:grpSpPr/>
       <p:sp>
         <p:nvSpPr>
-          <p:cNvPr id="2" name="Rectangle 1"/>
-          <p:cNvSpPr/>
+          <p:cNvPr id="2" name="TextBox 1"/>
+          <p:cNvSpPr txBox="1"/>
           <p:nvPr/>
         </p:nvSpPr>
         <p:spPr>
           <a:xfrm>
-            <a:off x="0" y="0"/>
-            <a:ext cx="12188952" cy="841248"/>
+            <a:off x="548640" y="274320"/>
+            <a:ext cx="11091672" cy="475488"/>
           </a:xfrm>
           <a:prstGeom prst="rect">
             <a:avLst/>
           </a:prstGeom>
           <a:solidFill>
-            <a:srgbClr val="8B1A1A"/>
+            <a:srgbClr val="FFFFFF"/>
           </a:solidFill>
           <a:ln>
             <a:noFill/>
           </a:ln>
           <a:effectLst/>
         </p:spPr>
-        <p:style>
-          <a:lnRef idx="1">
-            <a:schemeClr val="accent1"/>
-          </a:lnRef>
-          <a:fillRef idx="3">
-            <a:schemeClr val="accent1"/>
-          </a:fillRef>
-          <a:effectRef idx="2">
-            <a:schemeClr val="accent1"/>
-          </a:effectRef>
-          <a:fontRef idx="minor">
-            <a:schemeClr val="lt1"/>
-          </a:fontRef>
-        </p:style>
-        <p:txBody>
-          <a:bodyPr rtlCol="0" anchor="ctr" wrap="none" lIns="548640" rIns="274320" tIns="0" bIns="0"/>
+        <p:txBody>
+          <a:bodyPr wrap="none" anchor="ctr" lIns="0" rIns="0" tIns="0" bIns="0">
+            <a:spAutoFit/>
+          </a:bodyPr>
           <a:lstStyle/>
           <a:p>
             <a:pPr algn="l"/>
             <a:r>
-              <a:rPr sz="2800" b="1" i="0">
-                <a:solidFill>
-                  <a:srgbClr val="FFFFFF"/>
+              <a:rPr sz="2400" b="1" i="0">
+                <a:solidFill>
+                  <a:srgbClr val="8B1A1A"/>
                 </a:solidFill>
                 <a:latin typeface="微软雅黑"/>
                 <a:ea typeface="微软雅黑"/>
@@ -3791,8 +3779,8 @@
         </p:nvSpPr>
         <p:spPr>
           <a:xfrm>
-            <a:off x="548640" y="914400"/>
-            <a:ext cx="11091672" cy="384048"/>
+            <a:off x="548640" y="841248"/>
+            <a:ext cx="11091672" cy="530352"/>
           </a:xfrm>
           <a:prstGeom prst="rect">
             <a:avLst/>
@@ -3815,12 +3803,92 @@
             <a:r>
               <a:rPr sz="1300" b="0" i="0">
                 <a:solidFill>
-                  <a:srgbClr val="5B6B7A"/>
+                  <a:srgbClr val="000000"/>
                 </a:solidFill>
                 <a:latin typeface="微软雅黑"/>
                 <a:ea typeface="微软雅黑"/>
               </a:rPr>
-              <a:t>关键词：艾因柯蓝</a:t>
+              <a:t>当前方案：设备连接参数由 </a:t>
+            </a:r>
+            <a:r>
+              <a:rPr sz="1300" b="0" i="0">
+                <a:solidFill>
+                  <a:srgbClr val="1F3864"/>
+                </a:solidFill>
+                <a:latin typeface="微软雅黑"/>
+                <a:ea typeface="微软雅黑"/>
+              </a:rPr>
+              <a:t>tps.json</a:t>
+            </a:r>
+            <a:r>
+              <a:rPr sz="1300" b="0" i="0">
+                <a:solidFill>
+                  <a:srgbClr val="000000"/>
+                </a:solidFill>
+                <a:latin typeface="微软雅黑"/>
+                <a:ea typeface="微软雅黑"/>
+              </a:rPr>
+              <a:t> 的 </a:t>
+            </a:r>
+            <a:r>
+              <a:rPr sz="1300" b="0" i="0">
+                <a:solidFill>
+                  <a:srgbClr val="1F3864"/>
+                </a:solidFill>
+                <a:latin typeface="微软雅黑"/>
+                <a:ea typeface="微软雅黑"/>
+              </a:rPr>
+              <a:t>device_config</a:t>
+            </a:r>
+            <a:r>
+              <a:rPr sz="1300" b="0" i="0">
+                <a:solidFill>
+                  <a:srgbClr val="000000"/>
+                </a:solidFill>
+                <a:latin typeface="微软雅黑"/>
+                <a:ea typeface="微软雅黑"/>
+              </a:rPr>
+              <a:t> 参数化，随 </a:t>
+            </a:r>
+            <a:r>
+              <a:rPr sz="1300" b="0" i="0">
+                <a:solidFill>
+                  <a:srgbClr val="1F3864"/>
+                </a:solidFill>
+                <a:latin typeface="微软雅黑"/>
+                <a:ea typeface="微软雅黑"/>
+              </a:rPr>
+              <a:t>ate_env.json</a:t>
+            </a:r>
+            <a:r>
+              <a:rPr sz="1300" b="0" i="0">
+                <a:solidFill>
+                  <a:srgbClr val="000000"/>
+                </a:solidFill>
+                <a:latin typeface="微软雅黑"/>
+                <a:ea typeface="微软雅黑"/>
+              </a:rPr>
+              <a:t> 下发注入用例进程；仿真模式经 </a:t>
+            </a:r>
+            <a:r>
+              <a:rPr sz="1300" b="0" i="0">
+                <a:solidFill>
+                  <a:srgbClr val="1F3864"/>
+                </a:solidFill>
+                <a:latin typeface="微软雅黑"/>
+                <a:ea typeface="微软雅黑"/>
+              </a:rPr>
+              <a:t>mode（real / simulate）</a:t>
+            </a:r>
+            <a:r>
+              <a:rPr sz="1300" b="0" i="0">
+                <a:solidFill>
+                  <a:srgbClr val="000000"/>
+                </a:solidFill>
+                <a:latin typeface="微软雅黑"/>
+                <a:ea typeface="微软雅黑"/>
+              </a:rPr>
+              <a:t> 选择真实或仿真驱动实现。</a:t>
             </a:r>
           </a:p>
         </p:txBody>
@@ -3841,7 +3909,7 @@
         </p:blipFill>
         <p:spPr>
           <a:xfrm>
-            <a:off x="548640" y="1572768"/>
+            <a:off x="548640" y="1609344"/>
             <a:ext cx="11091672" cy="4667745"/>
           </a:xfrm>
           <a:prstGeom prst="rect">
@@ -3857,7 +3925,7 @@
         </p:nvSpPr>
         <p:spPr>
           <a:xfrm>
-            <a:off x="548640" y="6355080"/>
+            <a:off x="548640" y="6382512"/>
             <a:ext cx="11091672" cy="310896"/>
           </a:xfrm>
           <a:prstGeom prst="rect">
@@ -3913,49 +3981,37 @@
       <p:grpSpPr/>
       <p:sp>
         <p:nvSpPr>
-          <p:cNvPr id="2" name="Rectangle 1"/>
-          <p:cNvSpPr/>
+          <p:cNvPr id="2" name="TextBox 1"/>
+          <p:cNvSpPr txBox="1"/>
           <p:nvPr/>
         </p:nvSpPr>
         <p:spPr>
           <a:xfrm>
-            <a:off x="0" y="0"/>
-            <a:ext cx="12188952" cy="841248"/>
+            <a:off x="548640" y="274320"/>
+            <a:ext cx="11091672" cy="475488"/>
           </a:xfrm>
           <a:prstGeom prst="rect">
             <a:avLst/>
           </a:prstGeom>
           <a:solidFill>
-            <a:srgbClr val="8B1A1A"/>
+            <a:srgbClr val="FFFFFF"/>
           </a:solidFill>
           <a:ln>
             <a:noFill/>
           </a:ln>
           <a:effectLst/>
         </p:spPr>
-        <p:style>
-          <a:lnRef idx="1">
-            <a:schemeClr val="accent1"/>
-          </a:lnRef>
-          <a:fillRef idx="3">
-            <a:schemeClr val="accent1"/>
-          </a:fillRef>
-          <a:effectRef idx="2">
-            <a:schemeClr val="accent1"/>
-          </a:effectRef>
-          <a:fontRef idx="minor">
-            <a:schemeClr val="lt1"/>
-          </a:fontRef>
-        </p:style>
-        <p:txBody>
-          <a:bodyPr rtlCol="0" anchor="ctr" wrap="none" lIns="548640" rIns="274320" tIns="0" bIns="0"/>
+        <p:txBody>
+          <a:bodyPr wrap="none" anchor="ctr" lIns="0" rIns="0" tIns="0" bIns="0">
+            <a:spAutoFit/>
+          </a:bodyPr>
           <a:lstStyle/>
           <a:p>
             <a:pPr algn="l"/>
             <a:r>
-              <a:rPr sz="2800" b="1" i="0">
-                <a:solidFill>
-                  <a:srgbClr val="FFFFFF"/>
+              <a:rPr sz="2400" b="1" i="0">
+                <a:solidFill>
+                  <a:srgbClr val="8B1A1A"/>
                 </a:solidFill>
                 <a:latin typeface="微软雅黑"/>
                 <a:ea typeface="微软雅黑"/>
@@ -3973,8 +4029,8 @@
         </p:nvSpPr>
         <p:spPr>
           <a:xfrm>
-            <a:off x="548640" y="914400"/>
-            <a:ext cx="11091672" cy="384048"/>
+            <a:off x="548640" y="841248"/>
+            <a:ext cx="11091672" cy="530352"/>
           </a:xfrm>
           <a:prstGeom prst="rect">
             <a:avLst/>
@@ -3997,12 +4053,52 @@
             <a:r>
               <a:rPr sz="1300" b="0" i="0">
                 <a:solidFill>
-                  <a:srgbClr val="5B6B7A"/>
+                  <a:srgbClr val="1F3864"/>
                 </a:solidFill>
                 <a:latin typeface="微软雅黑"/>
                 <a:ea typeface="微软雅黑"/>
               </a:rPr>
-              <a:t>执行粒度 · 用例间数据传递 · 设备连接复用</a:t>
+              <a:t>执行粒度</a:t>
+            </a:r>
+            <a:r>
+              <a:rPr sz="1300" b="0" i="0">
+                <a:solidFill>
+                  <a:srgbClr val="000000"/>
+                </a:solidFill>
+                <a:latin typeface="微软雅黑"/>
+                <a:ea typeface="微软雅黑"/>
+              </a:rPr>
+              <a:t> · </a:t>
+            </a:r>
+            <a:r>
+              <a:rPr sz="1300" b="0" i="0">
+                <a:solidFill>
+                  <a:srgbClr val="1F3864"/>
+                </a:solidFill>
+                <a:latin typeface="微软雅黑"/>
+                <a:ea typeface="微软雅黑"/>
+              </a:rPr>
+              <a:t>用例间数据传递</a:t>
+            </a:r>
+            <a:r>
+              <a:rPr sz="1300" b="0" i="0">
+                <a:solidFill>
+                  <a:srgbClr val="000000"/>
+                </a:solidFill>
+                <a:latin typeface="微软雅黑"/>
+                <a:ea typeface="微软雅黑"/>
+              </a:rPr>
+              <a:t> · </a:t>
+            </a:r>
+            <a:r>
+              <a:rPr sz="1300" b="0" i="0">
+                <a:solidFill>
+                  <a:srgbClr val="1F3864"/>
+                </a:solidFill>
+                <a:latin typeface="微软雅黑"/>
+                <a:ea typeface="微软雅黑"/>
+              </a:rPr>
+              <a:t>设备连接复用</a:t>
             </a:r>
           </a:p>
         </p:txBody>
@@ -4015,8 +4111,8 @@
         </p:nvSpPr>
         <p:spPr>
           <a:xfrm>
-            <a:off x="548640" y="1572768"/>
-            <a:ext cx="5317236" cy="2487168"/>
+            <a:off x="548640" y="1609344"/>
+            <a:ext cx="5317236" cy="2468880"/>
           </a:xfrm>
           <a:prstGeom prst="roundRect">
             <a:avLst>
@@ -4144,8 +4240,8 @@
         </p:nvSpPr>
         <p:spPr>
           <a:xfrm>
-            <a:off x="6323076" y="1572768"/>
-            <a:ext cx="5317236" cy="2487168"/>
+            <a:off x="6323076" y="1609344"/>
+            <a:ext cx="5317236" cy="2468880"/>
           </a:xfrm>
           <a:prstGeom prst="roundRect">
             <a:avLst>
@@ -4273,7 +4369,7 @@
         </p:nvSpPr>
         <p:spPr>
           <a:xfrm>
-            <a:off x="548640" y="4297680"/>
+            <a:off x="548640" y="4315968"/>
             <a:ext cx="11091672" cy="1417320"/>
           </a:xfrm>
           <a:prstGeom prst="roundRect">
@@ -4414,49 +4510,37 @@
       <p:grpSpPr/>
       <p:sp>
         <p:nvSpPr>
-          <p:cNvPr id="2" name="Rectangle 1"/>
-          <p:cNvSpPr/>
+          <p:cNvPr id="2" name="TextBox 1"/>
+          <p:cNvSpPr txBox="1"/>
           <p:nvPr/>
         </p:nvSpPr>
         <p:spPr>
           <a:xfrm>
-            <a:off x="0" y="0"/>
-            <a:ext cx="12188952" cy="841248"/>
+            <a:off x="548640" y="274320"/>
+            <a:ext cx="11091672" cy="475488"/>
           </a:xfrm>
           <a:prstGeom prst="rect">
             <a:avLst/>
           </a:prstGeom>
           <a:solidFill>
-            <a:srgbClr val="8B1A1A"/>
+            <a:srgbClr val="FFFFFF"/>
           </a:solidFill>
           <a:ln>
             <a:noFill/>
           </a:ln>
           <a:effectLst/>
         </p:spPr>
-        <p:style>
-          <a:lnRef idx="1">
-            <a:schemeClr val="accent1"/>
-          </a:lnRef>
-          <a:fillRef idx="3">
-            <a:schemeClr val="accent1"/>
-          </a:fillRef>
-          <a:effectRef idx="2">
-            <a:schemeClr val="accent1"/>
-          </a:effectRef>
-          <a:fontRef idx="minor">
-            <a:schemeClr val="lt1"/>
-          </a:fontRef>
-        </p:style>
-        <p:txBody>
-          <a:bodyPr rtlCol="0" anchor="ctr" wrap="none" lIns="548640" rIns="274320" tIns="0" bIns="0"/>
+        <p:txBody>
+          <a:bodyPr wrap="none" anchor="ctr" lIns="0" rIns="0" tIns="0" bIns="0">
+            <a:spAutoFit/>
+          </a:bodyPr>
           <a:lstStyle/>
           <a:p>
             <a:pPr algn="l"/>
             <a:r>
-              <a:rPr sz="2800" b="1" i="0">
-                <a:solidFill>
-                  <a:srgbClr val="FFFFFF"/>
+              <a:rPr sz="2400" b="1" i="0">
+                <a:solidFill>
+                  <a:srgbClr val="8B1A1A"/>
                 </a:solidFill>
                 <a:latin typeface="微软雅黑"/>
                 <a:ea typeface="微软雅黑"/>
@@ -4474,8 +4558,8 @@
         </p:nvSpPr>
         <p:spPr>
           <a:xfrm>
-            <a:off x="548640" y="914400"/>
-            <a:ext cx="11091672" cy="384048"/>
+            <a:off x="548640" y="841248"/>
+            <a:ext cx="11091672" cy="530352"/>
           </a:xfrm>
           <a:prstGeom prst="rect">
             <a:avLst/>
@@ -4498,12 +4582,22 @@
             <a:r>
               <a:rPr sz="1300" b="0" i="0">
                 <a:solidFill>
-                  <a:srgbClr val="5B6B7A"/>
+                  <a:srgbClr val="000000"/>
                 </a:solidFill>
                 <a:latin typeface="微软雅黑"/>
                 <a:ea typeface="微软雅黑"/>
               </a:rPr>
-              <a:t>评估对象：现有三条可选执行路线　·　当前 ATE 采用：方案C（逐用例多进程）</a:t>
+              <a:t>评估对象：现有三条可选执行路线　·　当前 ATE 采用：</a:t>
+            </a:r>
+            <a:r>
+              <a:rPr sz="1300" b="0" i="0">
+                <a:solidFill>
+                  <a:srgbClr val="1F3864"/>
+                </a:solidFill>
+                <a:latin typeface="微软雅黑"/>
+                <a:ea typeface="微软雅黑"/>
+              </a:rPr>
+              <a:t>方案C（逐用例多进程）</a:t>
             </a:r>
           </a:p>
         </p:txBody>
@@ -4517,7 +4611,7 @@
           <p:nvPr/>
         </p:nvGraphicFramePr>
         <p:xfrm>
-          <a:off x="548640" y="1481328"/>
+          <a:off x="548640" y="1536192"/>
           <a:ext cx="11091672" cy="4206240"/>
         </p:xfrm>
         <a:graphic>
@@ -5427,8 +5521,8 @@
         </p:nvSpPr>
         <p:spPr>
           <a:xfrm>
-            <a:off x="548640" y="5870448"/>
-            <a:ext cx="11091672" cy="603504"/>
+            <a:off x="548640" y="5907024"/>
+            <a:ext cx="11091672" cy="585216"/>
           </a:xfrm>
           <a:prstGeom prst="rect">
             <a:avLst/>
@@ -5490,7 +5584,7 @@
         </p:nvSpPr>
         <p:spPr>
           <a:xfrm>
-            <a:off x="548640" y="6510528"/>
+            <a:off x="548640" y="6528816"/>
             <a:ext cx="11091672" cy="256032"/>
           </a:xfrm>
           <a:prstGeom prst="rect">
@@ -5546,49 +5640,37 @@
       <p:grpSpPr/>
       <p:sp>
         <p:nvSpPr>
-          <p:cNvPr id="2" name="Rectangle 1"/>
-          <p:cNvSpPr/>
+          <p:cNvPr id="2" name="TextBox 1"/>
+          <p:cNvSpPr txBox="1"/>
           <p:nvPr/>
         </p:nvSpPr>
         <p:spPr>
           <a:xfrm>
-            <a:off x="0" y="0"/>
-            <a:ext cx="12188952" cy="841248"/>
+            <a:off x="548640" y="274320"/>
+            <a:ext cx="11091672" cy="475488"/>
           </a:xfrm>
           <a:prstGeom prst="rect">
             <a:avLst/>
           </a:prstGeom>
           <a:solidFill>
-            <a:srgbClr val="8B1A1A"/>
+            <a:srgbClr val="FFFFFF"/>
           </a:solidFill>
           <a:ln>
             <a:noFill/>
           </a:ln>
           <a:effectLst/>
         </p:spPr>
-        <p:style>
-          <a:lnRef idx="1">
-            <a:schemeClr val="accent1"/>
-          </a:lnRef>
-          <a:fillRef idx="3">
-            <a:schemeClr val="accent1"/>
-          </a:fillRef>
-          <a:effectRef idx="2">
-            <a:schemeClr val="accent1"/>
-          </a:effectRef>
-          <a:fontRef idx="minor">
-            <a:schemeClr val="lt1"/>
-          </a:fontRef>
-        </p:style>
-        <p:txBody>
-          <a:bodyPr rtlCol="0" anchor="ctr" wrap="none" lIns="548640" rIns="274320" tIns="0" bIns="0"/>
+        <p:txBody>
+          <a:bodyPr wrap="none" anchor="ctr" lIns="0" rIns="0" tIns="0" bIns="0">
+            <a:spAutoFit/>
+          </a:bodyPr>
           <a:lstStyle/>
           <a:p>
             <a:pPr algn="l"/>
             <a:r>
-              <a:rPr sz="2800" b="1" i="0">
-                <a:solidFill>
-                  <a:srgbClr val="FFFFFF"/>
+              <a:rPr sz="2400" b="1" i="0">
+                <a:solidFill>
+                  <a:srgbClr val="8B1A1A"/>
                 </a:solidFill>
                 <a:latin typeface="微软雅黑"/>
                 <a:ea typeface="微软雅黑"/>
@@ -5606,8 +5688,8 @@
         </p:nvSpPr>
         <p:spPr>
           <a:xfrm>
-            <a:off x="548640" y="914400"/>
-            <a:ext cx="11091672" cy="384048"/>
+            <a:off x="548640" y="841248"/>
+            <a:ext cx="11091672" cy="530352"/>
           </a:xfrm>
           <a:prstGeom prst="rect">
             <a:avLst/>
@@ -5630,12 +5712,112 @@
             <a:r>
               <a:rPr sz="1300" b="0" i="0">
                 <a:solidFill>
-                  <a:srgbClr val="5B6B7A"/>
+                  <a:srgbClr val="1F3864"/>
                 </a:solidFill>
                 <a:latin typeface="微软雅黑"/>
                 <a:ea typeface="微软雅黑"/>
               </a:rPr>
-              <a:t>故障隔离 · 硬超时 · 交互控制 · 数据传递 · 连接复用 · 判定口径</a:t>
+              <a:t>故障隔离</a:t>
+            </a:r>
+            <a:r>
+              <a:rPr sz="1300" b="0" i="0">
+                <a:solidFill>
+                  <a:srgbClr val="000000"/>
+                </a:solidFill>
+                <a:latin typeface="微软雅黑"/>
+                <a:ea typeface="微软雅黑"/>
+              </a:rPr>
+              <a:t> · </a:t>
+            </a:r>
+            <a:r>
+              <a:rPr sz="1300" b="0" i="0">
+                <a:solidFill>
+                  <a:srgbClr val="1F3864"/>
+                </a:solidFill>
+                <a:latin typeface="微软雅黑"/>
+                <a:ea typeface="微软雅黑"/>
+              </a:rPr>
+              <a:t>硬超时</a:t>
+            </a:r>
+            <a:r>
+              <a:rPr sz="1300" b="0" i="0">
+                <a:solidFill>
+                  <a:srgbClr val="000000"/>
+                </a:solidFill>
+                <a:latin typeface="微软雅黑"/>
+                <a:ea typeface="微软雅黑"/>
+              </a:rPr>
+              <a:t> · </a:t>
+            </a:r>
+            <a:r>
+              <a:rPr sz="1300" b="0" i="0">
+                <a:solidFill>
+                  <a:srgbClr val="1F3864"/>
+                </a:solidFill>
+                <a:latin typeface="微软雅黑"/>
+                <a:ea typeface="微软雅黑"/>
+              </a:rPr>
+              <a:t>交互控制</a:t>
+            </a:r>
+            <a:r>
+              <a:rPr sz="1300" b="0" i="0">
+                <a:solidFill>
+                  <a:srgbClr val="000000"/>
+                </a:solidFill>
+                <a:latin typeface="微软雅黑"/>
+                <a:ea typeface="微软雅黑"/>
+              </a:rPr>
+              <a:t> · </a:t>
+            </a:r>
+            <a:r>
+              <a:rPr sz="1300" b="0" i="0">
+                <a:solidFill>
+                  <a:srgbClr val="1F3864"/>
+                </a:solidFill>
+                <a:latin typeface="微软雅黑"/>
+                <a:ea typeface="微软雅黑"/>
+              </a:rPr>
+              <a:t>数据传递</a:t>
+            </a:r>
+            <a:r>
+              <a:rPr sz="1300" b="0" i="0">
+                <a:solidFill>
+                  <a:srgbClr val="000000"/>
+                </a:solidFill>
+                <a:latin typeface="微软雅黑"/>
+                <a:ea typeface="微软雅黑"/>
+              </a:rPr>
+              <a:t> · </a:t>
+            </a:r>
+            <a:r>
+              <a:rPr sz="1300" b="0" i="0">
+                <a:solidFill>
+                  <a:srgbClr val="1F3864"/>
+                </a:solidFill>
+                <a:latin typeface="微软雅黑"/>
+                <a:ea typeface="微软雅黑"/>
+              </a:rPr>
+              <a:t>连接复用</a:t>
+            </a:r>
+            <a:r>
+              <a:rPr sz="1300" b="0" i="0">
+                <a:solidFill>
+                  <a:srgbClr val="000000"/>
+                </a:solidFill>
+                <a:latin typeface="微软雅黑"/>
+                <a:ea typeface="微软雅黑"/>
+              </a:rPr>
+              <a:t> · </a:t>
+            </a:r>
+            <a:r>
+              <a:rPr sz="1300" b="0" i="0">
+                <a:solidFill>
+                  <a:srgbClr val="1F3864"/>
+                </a:solidFill>
+                <a:latin typeface="微软雅黑"/>
+                <a:ea typeface="微软雅黑"/>
+              </a:rPr>
+              <a:t>判定口径</a:t>
             </a:r>
           </a:p>
         </p:txBody>
@@ -5656,8 +5838,8 @@
         </p:blipFill>
         <p:spPr>
           <a:xfrm>
-            <a:off x="1380235" y="1517904"/>
-            <a:ext cx="9428480" cy="5303520"/>
+            <a:off x="1542796" y="1609344"/>
+            <a:ext cx="9103360" cy="5120640"/>
           </a:xfrm>
           <a:prstGeom prst="rect">
             <a:avLst/>

--- a/docs/测试执行方案.pptx
+++ b/docs/测试执行方案.pptx
@@ -715,7 +715,7 @@
           <a:lstStyle/>
           <a:p>
             <a:r>
-              <a:t>本页为《各方案潜在问题对照》信息图。方案C 标注「ATE 现状」，即当前 ATE 采用的逐用例多进程执行方式。三类方案的问题均围绕：故障隔离、硬超时能力、交互控制、数据传递、连接复用与口径变化展开。</a:t>
+              <a:t>本页以 PPT 原生文本呈现三类方案的潜在问题。方案C 列以深红描边与浅琥珀底标注「ATE 现状」。三类方案的问题均围绕：故障隔离、硬超时能力、交互控制、数据传递、连接复用与口径变化展开。</a:t>
             </a:r>
           </a:p>
         </p:txBody>
@@ -5822,30 +5822,1092 @@
           </a:p>
         </p:txBody>
       </p:sp>
-      <p:pic>
-        <p:nvPicPr>
-          <p:cNvPr id="4" name="Picture 3" descr="各方案潜在问题.png"/>
-          <p:cNvPicPr>
-            <a:picLocks noChangeAspect="1"/>
-          </p:cNvPicPr>
+      <p:sp>
+        <p:nvSpPr>
+          <p:cNvPr id="4" name="Rounded Rectangle 3"/>
+          <p:cNvSpPr/>
           <p:nvPr/>
-        </p:nvPicPr>
-        <p:blipFill>
-          <a:blip r:embed="rId2"/>
-          <a:stretch>
-            <a:fillRect/>
-          </a:stretch>
-        </p:blipFill>
+        </p:nvSpPr>
         <p:spPr>
           <a:xfrm>
-            <a:off x="1542796" y="1609344"/>
-            <a:ext cx="9103360" cy="5120640"/>
+            <a:off x="548640" y="1572768"/>
+            <a:ext cx="3526536" cy="5212080"/>
           </a:xfrm>
-          <a:prstGeom prst="rect">
-            <a:avLst/>
+          <a:prstGeom prst="roundRect">
+            <a:avLst>
+              <a:gd name="adj" fmla="val 3500"/>
+            </a:avLst>
           </a:prstGeom>
+          <a:solidFill>
+            <a:srgbClr val="F7F9FA"/>
+          </a:solidFill>
+          <a:ln w="12700">
+            <a:solidFill>
+              <a:srgbClr val="E2E8EA"/>
+            </a:solidFill>
+          </a:ln>
+          <a:effectLst/>
         </p:spPr>
-      </p:pic>
+        <p:style>
+          <a:lnRef idx="1">
+            <a:schemeClr val="accent1"/>
+          </a:lnRef>
+          <a:fillRef idx="3">
+            <a:schemeClr val="accent1"/>
+          </a:fillRef>
+          <a:effectRef idx="2">
+            <a:schemeClr val="accent1"/>
+          </a:effectRef>
+          <a:fontRef idx="minor">
+            <a:schemeClr val="lt1"/>
+          </a:fontRef>
+        </p:style>
+        <p:txBody>
+          <a:bodyPr rtlCol="0" anchor="t" wrap="square" lIns="201168" rIns="201168" tIns="182880" bIns="182880"/>
+          <a:lstStyle/>
+          <a:p>
+            <a:pPr algn="l">
+              <a:spcAft>
+                <a:spcPts val="1000"/>
+              </a:spcAft>
+            </a:pPr>
+            <a:r>
+              <a:rPr sz="1400" b="1" i="0">
+                <a:solidFill>
+                  <a:srgbClr val="8B1A1A"/>
+                </a:solidFill>
+                <a:latin typeface="Segoe UI"/>
+                <a:ea typeface="微软雅黑"/>
+              </a:rPr>
+              <a:t>方案A：单 pytest 进程</a:t>
+            </a:r>
+          </a:p>
+          <a:p>
+            <a:pPr algn="l">
+              <a:lnSpc>
+                <a:spcPct val="125000"/>
+              </a:lnSpc>
+              <a:spcAft>
+                <a:spcPts val="800"/>
+              </a:spcAft>
+            </a:pPr>
+            <a:r>
+              <a:rPr sz="1200" b="1" i="0">
+                <a:solidFill>
+                  <a:srgbClr val="8B1A1A"/>
+                </a:solidFill>
+                <a:latin typeface="Segoe UI"/>
+                <a:ea typeface="微软雅黑"/>
+              </a:rPr>
+              <a:t>1　</a:t>
+            </a:r>
+            <a:r>
+              <a:rPr sz="1200" b="1" i="0">
+                <a:solidFill>
+                  <a:srgbClr val="16222E"/>
+                </a:solidFill>
+                <a:latin typeface="Segoe UI"/>
+                <a:ea typeface="微软雅黑"/>
+              </a:rPr>
+              <a:t>故障隔离缺失</a:t>
+            </a:r>
+            <a:r>
+              <a:rPr sz="1200" b="1" i="0">
+                <a:solidFill>
+                  <a:srgbClr val="16222E"/>
+                </a:solidFill>
+                <a:latin typeface="Segoe UI"/>
+                <a:ea typeface="微软雅黑"/>
+              </a:rPr>
+              <a:t>：</a:t>
+            </a:r>
+            <a:r>
+              <a:rPr sz="1200" b="0" i="0">
+                <a:solidFill>
+                  <a:srgbClr val="5B6B7A"/>
+                </a:solidFill>
+                <a:latin typeface="Segoe UI"/>
+                <a:ea typeface="微软雅黑"/>
+              </a:rPr>
+              <a:t>单条用例若发生解释器崩溃、段错误或死锁，将中断整段乃至整轮执行，且无自动恢复。</a:t>
+            </a:r>
+          </a:p>
+          <a:p>
+            <a:pPr algn="l">
+              <a:lnSpc>
+                <a:spcPct val="125000"/>
+              </a:lnSpc>
+              <a:spcAft>
+                <a:spcPts val="800"/>
+              </a:spcAft>
+            </a:pPr>
+            <a:r>
+              <a:rPr sz="1200" b="1" i="0">
+                <a:solidFill>
+                  <a:srgbClr val="8B1A1A"/>
+                </a:solidFill>
+                <a:latin typeface="Segoe UI"/>
+                <a:ea typeface="微软雅黑"/>
+              </a:rPr>
+              <a:t>2　</a:t>
+            </a:r>
+            <a:r>
+              <a:rPr sz="1200" b="1" i="0">
+                <a:solidFill>
+                  <a:srgbClr val="16222E"/>
+                </a:solidFill>
+                <a:latin typeface="Segoe UI"/>
+                <a:ea typeface="微软雅黑"/>
+              </a:rPr>
+              <a:t>硬超时能力弱化</a:t>
+            </a:r>
+            <a:r>
+              <a:rPr sz="1200" b="1" i="0">
+                <a:solidFill>
+                  <a:srgbClr val="16222E"/>
+                </a:solidFill>
+                <a:latin typeface="Segoe UI"/>
+                <a:ea typeface="微软雅黑"/>
+              </a:rPr>
+              <a:t>：</a:t>
+            </a:r>
+            <a:r>
+              <a:rPr sz="1200" b="0" i="0">
+                <a:solidFill>
+                  <a:srgbClr val="5B6B7A"/>
+                </a:solidFill>
+                <a:latin typeface="Segoe UI"/>
+                <a:ea typeface="微软雅黑"/>
+              </a:rPr>
+              <a:t>进程内无法可靠强杀阻塞调用；看门狗注入异常仅在 Python 字节码边界生效，遇无超时的 C 调用即失效。</a:t>
+            </a:r>
+          </a:p>
+          <a:p>
+            <a:pPr algn="l">
+              <a:lnSpc>
+                <a:spcPct val="125000"/>
+              </a:lnSpc>
+              <a:spcAft>
+                <a:spcPts val="800"/>
+              </a:spcAft>
+            </a:pPr>
+            <a:r>
+              <a:rPr sz="1200" b="1" i="0">
+                <a:solidFill>
+                  <a:srgbClr val="8B1A1A"/>
+                </a:solidFill>
+                <a:latin typeface="Segoe UI"/>
+                <a:ea typeface="微软雅黑"/>
+              </a:rPr>
+              <a:t>3　</a:t>
+            </a:r>
+            <a:r>
+              <a:rPr sz="1200" b="1" i="0">
+                <a:solidFill>
+                  <a:srgbClr val="16222E"/>
+                </a:solidFill>
+                <a:latin typeface="Segoe UI"/>
+                <a:ea typeface="微软雅黑"/>
+              </a:rPr>
+              <a:t>交互控制需下沉</a:t>
+            </a:r>
+            <a:r>
+              <a:rPr sz="1200" b="1" i="0">
+                <a:solidFill>
+                  <a:srgbClr val="16222E"/>
+                </a:solidFill>
+                <a:latin typeface="Segoe UI"/>
+                <a:ea typeface="微软雅黑"/>
+              </a:rPr>
+              <a:t>：</a:t>
+            </a:r>
+            <a:r>
+              <a:rPr sz="1200" b="0" i="0">
+                <a:solidFill>
+                  <a:srgbClr val="5B6B7A"/>
+                </a:solidFill>
+                <a:latin typeface="Segoe UI"/>
+                <a:ea typeface="微软雅黑"/>
+              </a:rPr>
+              <a:t>人工操作、单步暂停、取消等原由 Runner 掌管的环节，须移入 conftest 或按交互点切分为多段执行。</a:t>
+            </a:r>
+          </a:p>
+          <a:p>
+            <a:pPr algn="l">
+              <a:lnSpc>
+                <a:spcPct val="125000"/>
+              </a:lnSpc>
+              <a:spcAft>
+                <a:spcPts val="800"/>
+              </a:spcAft>
+            </a:pPr>
+            <a:r>
+              <a:rPr sz="1200" b="1" i="0">
+                <a:solidFill>
+                  <a:srgbClr val="8B1A1A"/>
+                </a:solidFill>
+                <a:latin typeface="Segoe UI"/>
+                <a:ea typeface="微软雅黑"/>
+              </a:rPr>
+              <a:t>4　</a:t>
+            </a:r>
+            <a:r>
+              <a:rPr sz="1200" b="1" i="0">
+                <a:solidFill>
+                  <a:srgbClr val="16222E"/>
+                </a:solidFill>
+                <a:latin typeface="Segoe UI"/>
+                <a:ea typeface="微软雅黑"/>
+              </a:rPr>
+              <a:t>前置失败传播</a:t>
+            </a:r>
+            <a:r>
+              <a:rPr sz="1200" b="1" i="0">
+                <a:solidFill>
+                  <a:srgbClr val="16222E"/>
+                </a:solidFill>
+                <a:latin typeface="Segoe UI"/>
+                <a:ea typeface="微软雅黑"/>
+              </a:rPr>
+              <a:t>：</a:t>
+            </a:r>
+            <a:r>
+              <a:rPr sz="1200" b="0" i="0">
+                <a:solidFill>
+                  <a:srgbClr val="5B6B7A"/>
+                </a:solidFill>
+                <a:latin typeface="Segoe UI"/>
+                <a:ea typeface="微软雅黑"/>
+              </a:rPr>
+              <a:t>pytest 默认失败不中断，需自行实现「前置失败则跳过」，否则后续用例将在错误状态下继续执行。</a:t>
+            </a:r>
+          </a:p>
+          <a:p>
+            <a:pPr algn="l">
+              <a:lnSpc>
+                <a:spcPct val="125000"/>
+              </a:lnSpc>
+              <a:spcAft>
+                <a:spcPts val="800"/>
+              </a:spcAft>
+            </a:pPr>
+            <a:r>
+              <a:rPr sz="1200" b="1" i="0">
+                <a:solidFill>
+                  <a:srgbClr val="8B1A1A"/>
+                </a:solidFill>
+                <a:latin typeface="Segoe UI"/>
+                <a:ea typeface="微软雅黑"/>
+              </a:rPr>
+              <a:t>5　</a:t>
+            </a:r>
+            <a:r>
+              <a:rPr sz="1200" b="1" i="0">
+                <a:solidFill>
+                  <a:srgbClr val="16222E"/>
+                </a:solidFill>
+                <a:latin typeface="Segoe UI"/>
+                <a:ea typeface="微软雅黑"/>
+              </a:rPr>
+              <a:t>判定口径变化</a:t>
+            </a:r>
+            <a:r>
+              <a:rPr sz="1200" b="1" i="0">
+                <a:solidFill>
+                  <a:srgbClr val="16222E"/>
+                </a:solidFill>
+                <a:latin typeface="Segoe UI"/>
+                <a:ea typeface="微软雅黑"/>
+              </a:rPr>
+              <a:t>：</a:t>
+            </a:r>
+            <a:r>
+              <a:rPr sz="1200" b="0" i="0">
+                <a:solidFill>
+                  <a:srgbClr val="5B6B7A"/>
+                </a:solidFill>
+                <a:latin typeface="Segoe UI"/>
+                <a:ea typeface="微软雅黑"/>
+              </a:rPr>
+              <a:t>用例失败会 raise，整份运行退出码为非 0；每条用例状态必须以 run_result.json 为准，不可依赖退出码。</a:t>
+            </a:r>
+          </a:p>
+          <a:p>
+            <a:pPr algn="l">
+              <a:lnSpc>
+                <a:spcPct val="125000"/>
+              </a:lnSpc>
+              <a:spcAft>
+                <a:spcPts val="800"/>
+              </a:spcAft>
+            </a:pPr>
+            <a:r>
+              <a:rPr sz="1200" b="1" i="0">
+                <a:solidFill>
+                  <a:srgbClr val="8B1A1A"/>
+                </a:solidFill>
+                <a:latin typeface="Segoe UI"/>
+                <a:ea typeface="微软雅黑"/>
+              </a:rPr>
+              <a:t>6　</a:t>
+            </a:r>
+            <a:r>
+              <a:rPr sz="1200" b="1" i="0">
+                <a:solidFill>
+                  <a:srgbClr val="16222E"/>
+                </a:solidFill>
+                <a:latin typeface="Segoe UI"/>
+                <a:ea typeface="微软雅黑"/>
+              </a:rPr>
+              <a:t>状态累积风险</a:t>
+            </a:r>
+            <a:r>
+              <a:rPr sz="1200" b="1" i="0">
+                <a:solidFill>
+                  <a:srgbClr val="16222E"/>
+                </a:solidFill>
+                <a:latin typeface="Segoe UI"/>
+                <a:ea typeface="微软雅黑"/>
+              </a:rPr>
+              <a:t>：</a:t>
+            </a:r>
+            <a:r>
+              <a:rPr sz="1200" b="0" i="0">
+                <a:solidFill>
+                  <a:srgbClr val="5B6B7A"/>
+                </a:solidFill>
+                <a:latin typeface="Segoe UI"/>
+                <a:ea typeface="微软雅黑"/>
+              </a:rPr>
+              <a:t>同进程长时间运行，驱动与上下文状态持续累积，异常状态可能跨用例污染后续执行。</a:t>
+            </a:r>
+          </a:p>
+        </p:txBody>
+      </p:sp>
+      <p:sp>
+        <p:nvSpPr>
+          <p:cNvPr id="5" name="Rounded Rectangle 4"/>
+          <p:cNvSpPr/>
+          <p:nvPr/>
+        </p:nvSpPr>
+        <p:spPr>
+          <a:xfrm>
+            <a:off x="4331208" y="1572768"/>
+            <a:ext cx="3526536" cy="5212080"/>
+          </a:xfrm>
+          <a:prstGeom prst="roundRect">
+            <a:avLst>
+              <a:gd name="adj" fmla="val 3500"/>
+            </a:avLst>
+          </a:prstGeom>
+          <a:solidFill>
+            <a:srgbClr val="F7F9FA"/>
+          </a:solidFill>
+          <a:ln w="12700">
+            <a:solidFill>
+              <a:srgbClr val="E2E8EA"/>
+            </a:solidFill>
+          </a:ln>
+          <a:effectLst/>
+        </p:spPr>
+        <p:style>
+          <a:lnRef idx="1">
+            <a:schemeClr val="accent1"/>
+          </a:lnRef>
+          <a:fillRef idx="3">
+            <a:schemeClr val="accent1"/>
+          </a:fillRef>
+          <a:effectRef idx="2">
+            <a:schemeClr val="accent1"/>
+          </a:effectRef>
+          <a:fontRef idx="minor">
+            <a:schemeClr val="lt1"/>
+          </a:fontRef>
+        </p:style>
+        <p:txBody>
+          <a:bodyPr rtlCol="0" anchor="t" wrap="square" lIns="201168" rIns="201168" tIns="182880" bIns="182880"/>
+          <a:lstStyle/>
+          <a:p>
+            <a:pPr algn="l">
+              <a:spcAft>
+                <a:spcPts val="1000"/>
+              </a:spcAft>
+            </a:pPr>
+            <a:r>
+              <a:rPr sz="1400" b="1" i="0">
+                <a:solidFill>
+                  <a:srgbClr val="8B1A1A"/>
+                </a:solidFill>
+                <a:latin typeface="Segoe UI"/>
+                <a:ea typeface="微软雅黑"/>
+              </a:rPr>
+              <a:t>方案B：非 pytest（函数直调）</a:t>
+            </a:r>
+          </a:p>
+          <a:p>
+            <a:pPr algn="l">
+              <a:lnSpc>
+                <a:spcPct val="125000"/>
+              </a:lnSpc>
+              <a:spcAft>
+                <a:spcPts val="800"/>
+              </a:spcAft>
+            </a:pPr>
+            <a:r>
+              <a:rPr sz="1200" b="1" i="0">
+                <a:solidFill>
+                  <a:srgbClr val="8B1A1A"/>
+                </a:solidFill>
+                <a:latin typeface="Segoe UI"/>
+                <a:ea typeface="微软雅黑"/>
+              </a:rPr>
+              <a:t>1　</a:t>
+            </a:r>
+            <a:r>
+              <a:rPr sz="1200" b="1" i="0">
+                <a:solidFill>
+                  <a:srgbClr val="16222E"/>
+                </a:solidFill>
+                <a:latin typeface="Segoe UI"/>
+                <a:ea typeface="微软雅黑"/>
+              </a:rPr>
+              <a:t>基础设施需自建</a:t>
+            </a:r>
+            <a:r>
+              <a:rPr sz="1200" b="1" i="0">
+                <a:solidFill>
+                  <a:srgbClr val="16222E"/>
+                </a:solidFill>
+                <a:latin typeface="Segoe UI"/>
+                <a:ea typeface="微软雅黑"/>
+              </a:rPr>
+              <a:t>：</a:t>
+            </a:r>
+            <a:r>
+              <a:rPr sz="1200" b="0" i="0">
+                <a:solidFill>
+                  <a:srgbClr val="5B6B7A"/>
+                </a:solidFill>
+                <a:latin typeface="Segoe UI"/>
+                <a:ea typeface="微软雅黑"/>
+              </a:rPr>
+              <a:t>用例收集、参数化、报告输出、单条复跑锚点与异常栈，均需自行实现，工作量与维护成本高。</a:t>
+            </a:r>
+          </a:p>
+          <a:p>
+            <a:pPr algn="l">
+              <a:lnSpc>
+                <a:spcPct val="125000"/>
+              </a:lnSpc>
+              <a:spcAft>
+                <a:spcPts val="800"/>
+              </a:spcAft>
+            </a:pPr>
+            <a:r>
+              <a:rPr sz="1200" b="1" i="0">
+                <a:solidFill>
+                  <a:srgbClr val="8B1A1A"/>
+                </a:solidFill>
+                <a:latin typeface="Segoe UI"/>
+                <a:ea typeface="微软雅黑"/>
+              </a:rPr>
+              <a:t>2　</a:t>
+            </a:r>
+            <a:r>
+              <a:rPr sz="1200" b="1" i="0">
+                <a:solidFill>
+                  <a:srgbClr val="16222E"/>
+                </a:solidFill>
+                <a:latin typeface="Segoe UI"/>
+                <a:ea typeface="微软雅黑"/>
+              </a:rPr>
+              <a:t>生态脱节</a:t>
+            </a:r>
+            <a:r>
+              <a:rPr sz="1200" b="1" i="0">
+                <a:solidFill>
+                  <a:srgbClr val="16222E"/>
+                </a:solidFill>
+                <a:latin typeface="Segoe UI"/>
+                <a:ea typeface="微软雅黑"/>
+              </a:rPr>
+              <a:t>：</a:t>
+            </a:r>
+            <a:r>
+              <a:rPr sz="1200" b="0" i="0">
+                <a:solidFill>
+                  <a:srgbClr val="5B6B7A"/>
+                </a:solidFill>
+                <a:latin typeface="Segoe UI"/>
+                <a:ea typeface="微软雅黑"/>
+              </a:rPr>
+              <a:t>失去 pytest 工具链（--collect-only 校验、插件、标准报告），与团队既有约定不一致。</a:t>
+            </a:r>
+          </a:p>
+          <a:p>
+            <a:pPr algn="l">
+              <a:lnSpc>
+                <a:spcPct val="125000"/>
+              </a:lnSpc>
+              <a:spcAft>
+                <a:spcPts val="800"/>
+              </a:spcAft>
+            </a:pPr>
+            <a:r>
+              <a:rPr sz="1200" b="1" i="0">
+                <a:solidFill>
+                  <a:srgbClr val="8B1A1A"/>
+                </a:solidFill>
+                <a:latin typeface="Segoe UI"/>
+                <a:ea typeface="微软雅黑"/>
+              </a:rPr>
+              <a:t>3　</a:t>
+            </a:r>
+            <a:r>
+              <a:rPr sz="1200" b="1" i="0">
+                <a:solidFill>
+                  <a:srgbClr val="16222E"/>
+                </a:solidFill>
+                <a:latin typeface="Segoe UI"/>
+                <a:ea typeface="微软雅黑"/>
+              </a:rPr>
+              <a:t>超时局限同方案A</a:t>
+            </a:r>
+            <a:r>
+              <a:rPr sz="1200" b="1" i="0">
+                <a:solidFill>
+                  <a:srgbClr val="16222E"/>
+                </a:solidFill>
+                <a:latin typeface="Segoe UI"/>
+                <a:ea typeface="微软雅黑"/>
+              </a:rPr>
+              <a:t>：</a:t>
+            </a:r>
+            <a:r>
+              <a:rPr sz="1200" b="0" i="0">
+                <a:solidFill>
+                  <a:srgbClr val="5B6B7A"/>
+                </a:solidFill>
+                <a:latin typeface="Segoe UI"/>
+                <a:ea typeface="微软雅黑"/>
+              </a:rPr>
+              <a:t>仍受「进程内无法强杀阻塞调用」的限制，单用例超时的可靠性不升反降。</a:t>
+            </a:r>
+          </a:p>
+          <a:p>
+            <a:pPr algn="l">
+              <a:lnSpc>
+                <a:spcPct val="125000"/>
+              </a:lnSpc>
+              <a:spcAft>
+                <a:spcPts val="800"/>
+              </a:spcAft>
+            </a:pPr>
+            <a:r>
+              <a:rPr sz="1200" b="1" i="0">
+                <a:solidFill>
+                  <a:srgbClr val="8B1A1A"/>
+                </a:solidFill>
+                <a:latin typeface="Segoe UI"/>
+                <a:ea typeface="微软雅黑"/>
+              </a:rPr>
+              <a:t>4　</a:t>
+            </a:r>
+            <a:r>
+              <a:rPr sz="1200" b="1" i="0">
+                <a:solidFill>
+                  <a:srgbClr val="16222E"/>
+                </a:solidFill>
+                <a:latin typeface="Segoe UI"/>
+                <a:ea typeface="微软雅黑"/>
+              </a:rPr>
+              <a:t>故障隔离同样缺失</a:t>
+            </a:r>
+            <a:r>
+              <a:rPr sz="1200" b="1" i="0">
+                <a:solidFill>
+                  <a:srgbClr val="16222E"/>
+                </a:solidFill>
+                <a:latin typeface="Segoe UI"/>
+                <a:ea typeface="微软雅黑"/>
+              </a:rPr>
+              <a:t>：</a:t>
+            </a:r>
+            <a:r>
+              <a:rPr sz="1200" b="0" i="0">
+                <a:solidFill>
+                  <a:srgbClr val="5B6B7A"/>
+                </a:solidFill>
+                <a:latin typeface="Segoe UI"/>
+                <a:ea typeface="微软雅黑"/>
+              </a:rPr>
+              <a:t>单条用例崩溃即影响整轮，缺少进程边界作为最后兜底。</a:t>
+            </a:r>
+          </a:p>
+          <a:p>
+            <a:pPr algn="l">
+              <a:lnSpc>
+                <a:spcPct val="125000"/>
+              </a:lnSpc>
+              <a:spcAft>
+                <a:spcPts val="800"/>
+              </a:spcAft>
+            </a:pPr>
+            <a:r>
+              <a:rPr sz="1200" b="1" i="0">
+                <a:solidFill>
+                  <a:srgbClr val="8B1A1A"/>
+                </a:solidFill>
+                <a:latin typeface="Segoe UI"/>
+                <a:ea typeface="微软雅黑"/>
+              </a:rPr>
+              <a:t>5　</a:t>
+            </a:r>
+            <a:r>
+              <a:rPr sz="1200" b="1" i="0">
+                <a:solidFill>
+                  <a:srgbClr val="16222E"/>
+                </a:solidFill>
+                <a:latin typeface="Segoe UI"/>
+                <a:ea typeface="微软雅黑"/>
+              </a:rPr>
+              <a:t>维护与交接成本</a:t>
+            </a:r>
+            <a:r>
+              <a:rPr sz="1200" b="1" i="0">
+                <a:solidFill>
+                  <a:srgbClr val="16222E"/>
+                </a:solidFill>
+                <a:latin typeface="Segoe UI"/>
+                <a:ea typeface="微软雅黑"/>
+              </a:rPr>
+              <a:t>：</a:t>
+            </a:r>
+            <a:r>
+              <a:rPr sz="1200" b="0" i="0">
+                <a:solidFill>
+                  <a:srgbClr val="5B6B7A"/>
+                </a:solidFill>
+                <a:latin typeface="Segoe UI"/>
+                <a:ea typeface="微软雅黑"/>
+              </a:rPr>
+              <a:t>自研执行器偏离既有认知，培训、交接与长期维护成本上升。</a:t>
+            </a:r>
+          </a:p>
+          <a:p>
+            <a:pPr algn="l">
+              <a:lnSpc>
+                <a:spcPct val="125000"/>
+              </a:lnSpc>
+              <a:spcAft>
+                <a:spcPts val="800"/>
+              </a:spcAft>
+            </a:pPr>
+            <a:r>
+              <a:rPr sz="1200" b="1" i="0">
+                <a:solidFill>
+                  <a:srgbClr val="8B1A1A"/>
+                </a:solidFill>
+                <a:latin typeface="Segoe UI"/>
+                <a:ea typeface="微软雅黑"/>
+              </a:rPr>
+              <a:t>6　</a:t>
+            </a:r>
+            <a:r>
+              <a:rPr sz="1200" b="1" i="0">
+                <a:solidFill>
+                  <a:srgbClr val="16222E"/>
+                </a:solidFill>
+                <a:latin typeface="Segoe UI"/>
+                <a:ea typeface="微软雅黑"/>
+              </a:rPr>
+              <a:t>契约需重建</a:t>
+            </a:r>
+            <a:r>
+              <a:rPr sz="1200" b="1" i="0">
+                <a:solidFill>
+                  <a:srgbClr val="16222E"/>
+                </a:solidFill>
+                <a:latin typeface="Segoe UI"/>
+                <a:ea typeface="微软雅黑"/>
+              </a:rPr>
+              <a:t>：</a:t>
+            </a:r>
+            <a:r>
+              <a:rPr sz="1200" b="0" i="0">
+                <a:solidFill>
+                  <a:srgbClr val="5B6B7A"/>
+                </a:solidFill>
+                <a:latin typeface="Segoe UI"/>
+                <a:ea typeface="微软雅黑"/>
+              </a:rPr>
+              <a:t>现有生成文件与 nodeid 等契约不再复用，需重新建立清单到执行器的映射。</a:t>
+            </a:r>
+          </a:p>
+        </p:txBody>
+      </p:sp>
+      <p:sp>
+        <p:nvSpPr>
+          <p:cNvPr id="6" name="Rounded Rectangle 5"/>
+          <p:cNvSpPr/>
+          <p:nvPr/>
+        </p:nvSpPr>
+        <p:spPr>
+          <a:xfrm>
+            <a:off x="8113776" y="1572768"/>
+            <a:ext cx="3526536" cy="5212080"/>
+          </a:xfrm>
+          <a:prstGeom prst="roundRect">
+            <a:avLst>
+              <a:gd name="adj" fmla="val 3500"/>
+            </a:avLst>
+          </a:prstGeom>
+          <a:solidFill>
+            <a:srgbClr val="FDF3E3"/>
+          </a:solidFill>
+          <a:ln w="19050">
+            <a:solidFill>
+              <a:srgbClr val="8B1A1A"/>
+            </a:solidFill>
+          </a:ln>
+          <a:effectLst/>
+        </p:spPr>
+        <p:style>
+          <a:lnRef idx="1">
+            <a:schemeClr val="accent1"/>
+          </a:lnRef>
+          <a:fillRef idx="3">
+            <a:schemeClr val="accent1"/>
+          </a:fillRef>
+          <a:effectRef idx="2">
+            <a:schemeClr val="accent1"/>
+          </a:effectRef>
+          <a:fontRef idx="minor">
+            <a:schemeClr val="lt1"/>
+          </a:fontRef>
+        </p:style>
+        <p:txBody>
+          <a:bodyPr rtlCol="0" anchor="t" wrap="square" lIns="201168" rIns="201168" tIns="182880" bIns="182880"/>
+          <a:lstStyle/>
+          <a:p>
+            <a:pPr algn="l">
+              <a:spcAft>
+                <a:spcPts val="1000"/>
+              </a:spcAft>
+            </a:pPr>
+            <a:r>
+              <a:rPr sz="1400" b="1" i="0">
+                <a:solidFill>
+                  <a:srgbClr val="8B1A1A"/>
+                </a:solidFill>
+                <a:latin typeface="Segoe UI"/>
+                <a:ea typeface="微软雅黑"/>
+              </a:rPr>
+              <a:t>方案C：多 pytest 进程（逐用例）· ATE 现状</a:t>
+            </a:r>
+          </a:p>
+          <a:p>
+            <a:pPr algn="l">
+              <a:lnSpc>
+                <a:spcPct val="125000"/>
+              </a:lnSpc>
+              <a:spcAft>
+                <a:spcPts val="800"/>
+              </a:spcAft>
+            </a:pPr>
+            <a:r>
+              <a:rPr sz="1200" b="1" i="0">
+                <a:solidFill>
+                  <a:srgbClr val="8B1A1A"/>
+                </a:solidFill>
+                <a:latin typeface="Segoe UI"/>
+                <a:ea typeface="微软雅黑"/>
+              </a:rPr>
+              <a:t>1　</a:t>
+            </a:r>
+            <a:r>
+              <a:rPr sz="1200" b="1" i="0">
+                <a:solidFill>
+                  <a:srgbClr val="16222E"/>
+                </a:solidFill>
+                <a:latin typeface="Segoe UI"/>
+                <a:ea typeface="微软雅黑"/>
+              </a:rPr>
+              <a:t>数据传递缺失</a:t>
+            </a:r>
+            <a:r>
+              <a:rPr sz="1200" b="1" i="0">
+                <a:solidFill>
+                  <a:srgbClr val="16222E"/>
+                </a:solidFill>
+                <a:latin typeface="Segoe UI"/>
+                <a:ea typeface="微软雅黑"/>
+              </a:rPr>
+              <a:t>：</a:t>
+            </a:r>
+            <a:r>
+              <a:rPr sz="1200" b="0" i="0">
+                <a:solidFill>
+                  <a:srgbClr val="5B6B7A"/>
+                </a:solidFill>
+                <a:latin typeface="Segoe UI"/>
+                <a:ea typeface="微软雅黑"/>
+              </a:rPr>
+              <a:t>跨进程仅能经 run_result.json 续写，无正式状态通道，前序用例的测量值难以传递。</a:t>
+            </a:r>
+          </a:p>
+          <a:p>
+            <a:pPr algn="l">
+              <a:lnSpc>
+                <a:spcPct val="125000"/>
+              </a:lnSpc>
+              <a:spcAft>
+                <a:spcPts val="800"/>
+              </a:spcAft>
+            </a:pPr>
+            <a:r>
+              <a:rPr sz="1200" b="1" i="0">
+                <a:solidFill>
+                  <a:srgbClr val="8B1A1A"/>
+                </a:solidFill>
+                <a:latin typeface="Segoe UI"/>
+                <a:ea typeface="微软雅黑"/>
+              </a:rPr>
+              <a:t>2　</a:t>
+            </a:r>
+            <a:r>
+              <a:rPr sz="1200" b="1" i="0">
+                <a:solidFill>
+                  <a:srgbClr val="16222E"/>
+                </a:solidFill>
+                <a:latin typeface="Segoe UI"/>
+                <a:ea typeface="微软雅黑"/>
+              </a:rPr>
+              <a:t>连接重复建立</a:t>
+            </a:r>
+            <a:r>
+              <a:rPr sz="1200" b="1" i="0">
+                <a:solidFill>
+                  <a:srgbClr val="16222E"/>
+                </a:solidFill>
+                <a:latin typeface="Segoe UI"/>
+                <a:ea typeface="微软雅黑"/>
+              </a:rPr>
+              <a:t>：</a:t>
+            </a:r>
+            <a:r>
+              <a:rPr sz="1200" b="0" i="0">
+                <a:solidFill>
+                  <a:srgbClr val="5B6B7A"/>
+                </a:solidFill>
+                <a:latin typeface="Segoe UI"/>
+                <a:ea typeface="微软雅黑"/>
+              </a:rPr>
+              <a:t>会话夹具随进程重建，每条用例重新建连，串口握手与仪器自检开销显著。</a:t>
+            </a:r>
+          </a:p>
+          <a:p>
+            <a:pPr algn="l">
+              <a:lnSpc>
+                <a:spcPct val="125000"/>
+              </a:lnSpc>
+              <a:spcAft>
+                <a:spcPts val="800"/>
+              </a:spcAft>
+            </a:pPr>
+            <a:r>
+              <a:rPr sz="1200" b="1" i="0">
+                <a:solidFill>
+                  <a:srgbClr val="8B1A1A"/>
+                </a:solidFill>
+                <a:latin typeface="Segoe UI"/>
+                <a:ea typeface="微软雅黑"/>
+              </a:rPr>
+              <a:t>3　</a:t>
+            </a:r>
+            <a:r>
+              <a:rPr sz="1200" b="1" i="0">
+                <a:solidFill>
+                  <a:srgbClr val="16222E"/>
+                </a:solidFill>
+                <a:latin typeface="Segoe UI"/>
+                <a:ea typeface="微软雅黑"/>
+              </a:rPr>
+              <a:t>进程启动开销</a:t>
+            </a:r>
+            <a:r>
+              <a:rPr sz="1200" b="1" i="0">
+                <a:solidFill>
+                  <a:srgbClr val="16222E"/>
+                </a:solidFill>
+                <a:latin typeface="Segoe UI"/>
+                <a:ea typeface="微软雅黑"/>
+              </a:rPr>
+              <a:t>：</a:t>
+            </a:r>
+            <a:r>
+              <a:rPr sz="1200" b="0" i="0">
+                <a:solidFill>
+                  <a:srgbClr val="5B6B7A"/>
+                </a:solidFill>
+                <a:latin typeface="Segoe UI"/>
+                <a:ea typeface="微软雅黑"/>
+              </a:rPr>
+              <a:t>每条用例一次 Python + pytest 启动（解释器导入、用例收集），累积耗时明显。</a:t>
+            </a:r>
+          </a:p>
+          <a:p>
+            <a:pPr algn="l">
+              <a:lnSpc>
+                <a:spcPct val="125000"/>
+              </a:lnSpc>
+              <a:spcAft>
+                <a:spcPts val="800"/>
+              </a:spcAft>
+            </a:pPr>
+            <a:r>
+              <a:rPr sz="1200" b="1" i="0">
+                <a:solidFill>
+                  <a:srgbClr val="8B1A1A"/>
+                </a:solidFill>
+                <a:latin typeface="Segoe UI"/>
+                <a:ea typeface="微软雅黑"/>
+              </a:rPr>
+              <a:t>4　</a:t>
+            </a:r>
+            <a:r>
+              <a:rPr sz="1200" b="1" i="0">
+                <a:solidFill>
+                  <a:srgbClr val="16222E"/>
+                </a:solidFill>
+                <a:latin typeface="Segoe UI"/>
+                <a:ea typeface="微软雅黑"/>
+              </a:rPr>
+              <a:t>状态无法延续</a:t>
+            </a:r>
+            <a:r>
+              <a:rPr sz="1200" b="1" i="0">
+                <a:solidFill>
+                  <a:srgbClr val="16222E"/>
+                </a:solidFill>
+                <a:latin typeface="Segoe UI"/>
+                <a:ea typeface="微软雅黑"/>
+              </a:rPr>
+              <a:t>：</a:t>
+            </a:r>
+            <a:r>
+              <a:rPr sz="1200" b="0" i="0">
+                <a:solidFill>
+                  <a:srgbClr val="5B6B7A"/>
+                </a:solidFill>
+                <a:latin typeface="Segoe UI"/>
+                <a:ea typeface="微软雅黑"/>
+              </a:rPr>
+              <a:t>无法在同进程内维持上下文与连接，跨用例协作只能依赖外置机制。</a:t>
+            </a:r>
+          </a:p>
+          <a:p>
+            <a:pPr algn="l">
+              <a:lnSpc>
+                <a:spcPct val="125000"/>
+              </a:lnSpc>
+              <a:spcAft>
+                <a:spcPts val="800"/>
+              </a:spcAft>
+            </a:pPr>
+            <a:r>
+              <a:rPr sz="1200" b="1" i="0">
+                <a:solidFill>
+                  <a:srgbClr val="8B1A1A"/>
+                </a:solidFill>
+                <a:latin typeface="Segoe UI"/>
+                <a:ea typeface="微软雅黑"/>
+              </a:rPr>
+              <a:t>5　</a:t>
+            </a:r>
+            <a:r>
+              <a:rPr sz="1200" b="1" i="0">
+                <a:solidFill>
+                  <a:srgbClr val="16222E"/>
+                </a:solidFill>
+                <a:latin typeface="Segoe UI"/>
+                <a:ea typeface="微软雅黑"/>
+              </a:rPr>
+              <a:t>文件反复读写</a:t>
+            </a:r>
+            <a:r>
+              <a:rPr sz="1200" b="1" i="0">
+                <a:solidFill>
+                  <a:srgbClr val="16222E"/>
+                </a:solidFill>
+                <a:latin typeface="Segoe UI"/>
+                <a:ea typeface="微软雅黑"/>
+              </a:rPr>
+              <a:t>：</a:t>
+            </a:r>
+            <a:r>
+              <a:rPr sz="1200" b="0" i="0">
+                <a:solidFill>
+                  <a:srgbClr val="5B6B7A"/>
+                </a:solidFill>
+                <a:latin typeface="Segoe UI"/>
+                <a:ea typeface="微软雅黑"/>
+              </a:rPr>
+              <a:t>run_result.json 反复 upsert 与读回，I/O 频次与实现复杂度上升。</a:t>
+            </a:r>
+          </a:p>
+          <a:p>
+            <a:pPr algn="l">
+              <a:lnSpc>
+                <a:spcPct val="125000"/>
+              </a:lnSpc>
+              <a:spcAft>
+                <a:spcPts val="800"/>
+              </a:spcAft>
+            </a:pPr>
+            <a:r>
+              <a:rPr sz="1200" b="1" i="0">
+                <a:solidFill>
+                  <a:srgbClr val="8B1A1A"/>
+                </a:solidFill>
+                <a:latin typeface="Segoe UI"/>
+                <a:ea typeface="微软雅黑"/>
+              </a:rPr>
+              <a:t>6　</a:t>
+            </a:r>
+            <a:r>
+              <a:rPr sz="1200" b="1" i="0">
+                <a:solidFill>
+                  <a:srgbClr val="16222E"/>
+                </a:solidFill>
+                <a:latin typeface="Segoe UI"/>
+                <a:ea typeface="微软雅黑"/>
+              </a:rPr>
+              <a:t>并发占用风险</a:t>
+            </a:r>
+            <a:r>
+              <a:rPr sz="1200" b="1" i="0">
+                <a:solidFill>
+                  <a:srgbClr val="16222E"/>
+                </a:solidFill>
+                <a:latin typeface="Segoe UI"/>
+                <a:ea typeface="微软雅黑"/>
+              </a:rPr>
+              <a:t>：</a:t>
+            </a:r>
+            <a:r>
+              <a:rPr sz="1200" b="0" i="0">
+                <a:solidFill>
+                  <a:srgbClr val="5B6B7A"/>
+                </a:solidFill>
+                <a:latin typeface="Segoe UI"/>
+                <a:ea typeface="微软雅黑"/>
+              </a:rPr>
+              <a:t>逐用例进程无法感知测试台占用，多任务并发时易争用同一台架（缺运行时占用锁）。</a:t>
+            </a:r>
+          </a:p>
+        </p:txBody>
+      </p:sp>
     </p:spTree>
   </p:cSld>
   <p:clrMapOvr>
